--- a/results/scenarios/scenarios_genie.pptx
+++ b/results/scenarios/scenarios_genie.pptx
@@ -6,7 +6,9 @@
   </p:sldMasterIdLst>
   <p:sldIdLst>
     <p:sldId id="256" r:id="rId2"/>
-    <p:sldId id="257" r:id="rId3"/>
+    <p:sldId id="258" r:id="rId3"/>
+    <p:sldId id="257" r:id="rId4"/>
+    <p:sldId id="259" r:id="rId5"/>
   </p:sldIdLst>
   <p:sldSz cx="12192000" cy="6858000"/>
   <p:notesSz cx="6858000" cy="9144000"/>
@@ -105,6 +107,11 @@
       </a:defRPr>
     </a:lvl9pPr>
   </p:defaultTextStyle>
+  <p:extLst>
+    <p:ext uri="{EFAFB233-063F-42B5-8137-9DF3F51BA10A}">
+      <p15:sldGuideLst xmlns:p15="http://schemas.microsoft.com/office/powerpoint/2012/main"/>
+    </p:ext>
+  </p:extLst>
 </p:presentation>
 </file>
 
@@ -257,7 +264,7 @@
           <a:p>
             <a:fld id="{C0EB9380-D9C8-4A6F-988E-863DD0B42BDC}" type="datetimeFigureOut">
               <a:rPr lang="sv-SE" smtClean="0"/>
-              <a:t>2025-11-11</a:t>
+              <a:t>2025-11-28</a:t>
             </a:fld>
             <a:endParaRPr lang="sv-SE"/>
           </a:p>
@@ -457,7 +464,7 @@
           <a:p>
             <a:fld id="{C0EB9380-D9C8-4A6F-988E-863DD0B42BDC}" type="datetimeFigureOut">
               <a:rPr lang="sv-SE" smtClean="0"/>
-              <a:t>2025-11-11</a:t>
+              <a:t>2025-11-28</a:t>
             </a:fld>
             <a:endParaRPr lang="sv-SE"/>
           </a:p>
@@ -667,7 +674,7 @@
           <a:p>
             <a:fld id="{C0EB9380-D9C8-4A6F-988E-863DD0B42BDC}" type="datetimeFigureOut">
               <a:rPr lang="sv-SE" smtClean="0"/>
-              <a:t>2025-11-11</a:t>
+              <a:t>2025-11-28</a:t>
             </a:fld>
             <a:endParaRPr lang="sv-SE"/>
           </a:p>
@@ -867,7 +874,7 @@
           <a:p>
             <a:fld id="{C0EB9380-D9C8-4A6F-988E-863DD0B42BDC}" type="datetimeFigureOut">
               <a:rPr lang="sv-SE" smtClean="0"/>
-              <a:t>2025-11-11</a:t>
+              <a:t>2025-11-28</a:t>
             </a:fld>
             <a:endParaRPr lang="sv-SE"/>
           </a:p>
@@ -1143,7 +1150,7 @@
           <a:p>
             <a:fld id="{C0EB9380-D9C8-4A6F-988E-863DD0B42BDC}" type="datetimeFigureOut">
               <a:rPr lang="sv-SE" smtClean="0"/>
-              <a:t>2025-11-11</a:t>
+              <a:t>2025-11-28</a:t>
             </a:fld>
             <a:endParaRPr lang="sv-SE"/>
           </a:p>
@@ -1411,7 +1418,7 @@
           <a:p>
             <a:fld id="{C0EB9380-D9C8-4A6F-988E-863DD0B42BDC}" type="datetimeFigureOut">
               <a:rPr lang="sv-SE" smtClean="0"/>
-              <a:t>2025-11-11</a:t>
+              <a:t>2025-11-28</a:t>
             </a:fld>
             <a:endParaRPr lang="sv-SE"/>
           </a:p>
@@ -1826,7 +1833,7 @@
           <a:p>
             <a:fld id="{C0EB9380-D9C8-4A6F-988E-863DD0B42BDC}" type="datetimeFigureOut">
               <a:rPr lang="sv-SE" smtClean="0"/>
-              <a:t>2025-11-11</a:t>
+              <a:t>2025-11-28</a:t>
             </a:fld>
             <a:endParaRPr lang="sv-SE"/>
           </a:p>
@@ -1968,7 +1975,7 @@
           <a:p>
             <a:fld id="{C0EB9380-D9C8-4A6F-988E-863DD0B42BDC}" type="datetimeFigureOut">
               <a:rPr lang="sv-SE" smtClean="0"/>
-              <a:t>2025-11-11</a:t>
+              <a:t>2025-11-28</a:t>
             </a:fld>
             <a:endParaRPr lang="sv-SE"/>
           </a:p>
@@ -2081,7 +2088,7 @@
           <a:p>
             <a:fld id="{C0EB9380-D9C8-4A6F-988E-863DD0B42BDC}" type="datetimeFigureOut">
               <a:rPr lang="sv-SE" smtClean="0"/>
-              <a:t>2025-11-11</a:t>
+              <a:t>2025-11-28</a:t>
             </a:fld>
             <a:endParaRPr lang="sv-SE"/>
           </a:p>
@@ -2394,7 +2401,7 @@
           <a:p>
             <a:fld id="{C0EB9380-D9C8-4A6F-988E-863DD0B42BDC}" type="datetimeFigureOut">
               <a:rPr lang="sv-SE" smtClean="0"/>
-              <a:t>2025-11-11</a:t>
+              <a:t>2025-11-28</a:t>
             </a:fld>
             <a:endParaRPr lang="sv-SE"/>
           </a:p>
@@ -2683,7 +2690,7 @@
           <a:p>
             <a:fld id="{C0EB9380-D9C8-4A6F-988E-863DD0B42BDC}" type="datetimeFigureOut">
               <a:rPr lang="sv-SE" smtClean="0"/>
-              <a:t>2025-11-11</a:t>
+              <a:t>2025-11-28</a:t>
             </a:fld>
             <a:endParaRPr lang="sv-SE"/>
           </a:p>
@@ -2926,7 +2933,7 @@
           <a:p>
             <a:fld id="{C0EB9380-D9C8-4A6F-988E-863DD0B42BDC}" type="datetimeFigureOut">
               <a:rPr lang="sv-SE" smtClean="0"/>
-              <a:t>2025-11-11</a:t>
+              <a:t>2025-11-28</a:t>
             </a:fld>
             <a:endParaRPr lang="sv-SE"/>
           </a:p>
@@ -3423,6 +3430,97 @@
           <a:chExt cx="0" cy="0"/>
         </a:xfrm>
       </p:grpSpPr>
+      <p:sp>
+        <p:nvSpPr>
+          <p:cNvPr id="2" name="Title 1">
+            <a:extLst>
+              <a:ext uri="{FF2B5EF4-FFF2-40B4-BE49-F238E27FC236}">
+                <a16:creationId xmlns:a16="http://schemas.microsoft.com/office/drawing/2014/main" id="{B3FCC8A6-5662-19C2-BE7B-33ABA4D03FA2}"/>
+              </a:ext>
+            </a:extLst>
+          </p:cNvPr>
+          <p:cNvSpPr>
+            <a:spLocks noGrp="1"/>
+          </p:cNvSpPr>
+          <p:nvPr>
+            <p:ph type="title"/>
+          </p:nvPr>
+        </p:nvSpPr>
+        <p:spPr/>
+        <p:txBody>
+          <a:bodyPr/>
+          <a:lstStyle/>
+          <a:p>
+            <a:endParaRPr lang="sv-SE"/>
+          </a:p>
+        </p:txBody>
+      </p:sp>
+      <p:pic>
+        <p:nvPicPr>
+          <p:cNvPr id="5" name="Content Placeholder 4">
+            <a:extLst>
+              <a:ext uri="{FF2B5EF4-FFF2-40B4-BE49-F238E27FC236}">
+                <a16:creationId xmlns:a16="http://schemas.microsoft.com/office/drawing/2014/main" id="{E5012CA8-C86B-4914-47F3-51534B8152A9}"/>
+              </a:ext>
+            </a:extLst>
+          </p:cNvPr>
+          <p:cNvPicPr>
+            <a:picLocks noGrp="1" noChangeAspect="1"/>
+          </p:cNvPicPr>
+          <p:nvPr>
+            <p:ph idx="1"/>
+          </p:nvPr>
+        </p:nvPicPr>
+        <p:blipFill>
+          <a:blip r:embed="rId2">
+            <a:extLst>
+              <a:ext uri="{28A0092B-C50C-407E-A947-70E740481C1C}">
+                <a14:useLocalDpi xmlns:a14="http://schemas.microsoft.com/office/drawing/2010/main" val="0"/>
+              </a:ext>
+            </a:extLst>
+          </a:blip>
+          <a:srcRect t="3770"/>
+          <a:stretch>
+            <a:fillRect/>
+          </a:stretch>
+        </p:blipFill>
+        <p:spPr>
+          <a:xfrm>
+            <a:off x="2951625" y="1972733"/>
+            <a:ext cx="6153283" cy="4187296"/>
+          </a:xfrm>
+        </p:spPr>
+      </p:pic>
+    </p:spTree>
+    <p:extLst>
+      <p:ext uri="{BB962C8B-B14F-4D97-AF65-F5344CB8AC3E}">
+        <p14:creationId xmlns:p14="http://schemas.microsoft.com/office/powerpoint/2010/main" val="2121836222"/>
+      </p:ext>
+    </p:extLst>
+  </p:cSld>
+  <p:clrMapOvr>
+    <a:masterClrMapping/>
+  </p:clrMapOvr>
+</p:sld>
+</file>
+
+<file path=ppt/slides/slide3.xml><?xml version="1.0" encoding="utf-8"?>
+<p:sld xmlns:a="http://schemas.openxmlformats.org/drawingml/2006/main" xmlns:r="http://schemas.openxmlformats.org/officeDocument/2006/relationships" xmlns:p="http://schemas.openxmlformats.org/presentationml/2006/main">
+  <p:cSld>
+    <p:spTree>
+      <p:nvGrpSpPr>
+        <p:cNvPr id="1" name=""/>
+        <p:cNvGrpSpPr/>
+        <p:nvPr/>
+      </p:nvGrpSpPr>
+      <p:grpSpPr>
+        <a:xfrm>
+          <a:off x="0" y="0"/>
+          <a:ext cx="0" cy="0"/>
+          <a:chOff x="0" y="0"/>
+          <a:chExt cx="0" cy="0"/>
+        </a:xfrm>
+      </p:grpSpPr>
       <p:pic>
         <p:nvPicPr>
           <p:cNvPr id="7" name="Picture 6">
@@ -3457,6 +3555,66 @@
     <p:extLst>
       <p:ext uri="{BB962C8B-B14F-4D97-AF65-F5344CB8AC3E}">
         <p14:creationId xmlns:p14="http://schemas.microsoft.com/office/powerpoint/2010/main" val="793223468"/>
+      </p:ext>
+    </p:extLst>
+  </p:cSld>
+  <p:clrMapOvr>
+    <a:masterClrMapping/>
+  </p:clrMapOvr>
+</p:sld>
+</file>
+
+<file path=ppt/slides/slide4.xml><?xml version="1.0" encoding="utf-8"?>
+<p:sld xmlns:a="http://schemas.openxmlformats.org/drawingml/2006/main" xmlns:r="http://schemas.openxmlformats.org/officeDocument/2006/relationships" xmlns:p="http://schemas.openxmlformats.org/presentationml/2006/main">
+  <p:cSld>
+    <p:spTree>
+      <p:nvGrpSpPr>
+        <p:cNvPr id="1" name=""/>
+        <p:cNvGrpSpPr/>
+        <p:nvPr/>
+      </p:nvGrpSpPr>
+      <p:grpSpPr>
+        <a:xfrm>
+          <a:off x="0" y="0"/>
+          <a:ext cx="0" cy="0"/>
+          <a:chOff x="0" y="0"/>
+          <a:chExt cx="0" cy="0"/>
+        </a:xfrm>
+      </p:grpSpPr>
+      <p:pic>
+        <p:nvPicPr>
+          <p:cNvPr id="5" name="Picture 4">
+            <a:extLst>
+              <a:ext uri="{FF2B5EF4-FFF2-40B4-BE49-F238E27FC236}">
+                <a16:creationId xmlns:a16="http://schemas.microsoft.com/office/drawing/2014/main" id="{AF461714-7416-6C7F-6828-0B7725FFF51C}"/>
+              </a:ext>
+            </a:extLst>
+          </p:cNvPr>
+          <p:cNvPicPr>
+            <a:picLocks noChangeAspect="1"/>
+          </p:cNvPicPr>
+          <p:nvPr/>
+        </p:nvPicPr>
+        <p:blipFill>
+          <a:blip r:embed="rId2"/>
+          <a:stretch>
+            <a:fillRect/>
+          </a:stretch>
+        </p:blipFill>
+        <p:spPr>
+          <a:xfrm>
+            <a:off x="1852612" y="404812"/>
+            <a:ext cx="8486775" cy="6048375"/>
+          </a:xfrm>
+          <a:prstGeom prst="rect">
+            <a:avLst/>
+          </a:prstGeom>
+        </p:spPr>
+      </p:pic>
+    </p:spTree>
+    <p:extLst>
+      <p:ext uri="{BB962C8B-B14F-4D97-AF65-F5344CB8AC3E}">
+        <p14:creationId xmlns:p14="http://schemas.microsoft.com/office/powerpoint/2010/main" val="3739807844"/>
       </p:ext>
     </p:extLst>
   </p:cSld>

--- a/results/scenarios/scenarios_genie.pptx
+++ b/results/scenarios/scenarios_genie.pptx
@@ -9,6 +9,10 @@
     <p:sldId id="258" r:id="rId3"/>
     <p:sldId id="257" r:id="rId4"/>
     <p:sldId id="259" r:id="rId5"/>
+    <p:sldId id="260" r:id="rId6"/>
+    <p:sldId id="261" r:id="rId7"/>
+    <p:sldId id="262" r:id="rId8"/>
+    <p:sldId id="263" r:id="rId9"/>
   </p:sldIdLst>
   <p:sldSz cx="12192000" cy="6858000"/>
   <p:notesSz cx="6858000" cy="9144000"/>
@@ -264,7 +268,7 @@
           <a:p>
             <a:fld id="{C0EB9380-D9C8-4A6F-988E-863DD0B42BDC}" type="datetimeFigureOut">
               <a:rPr lang="sv-SE" smtClean="0"/>
-              <a:t>2025-11-28</a:t>
+              <a:t>2025-12-12</a:t>
             </a:fld>
             <a:endParaRPr lang="sv-SE"/>
           </a:p>
@@ -464,7 +468,7 @@
           <a:p>
             <a:fld id="{C0EB9380-D9C8-4A6F-988E-863DD0B42BDC}" type="datetimeFigureOut">
               <a:rPr lang="sv-SE" smtClean="0"/>
-              <a:t>2025-11-28</a:t>
+              <a:t>2025-12-12</a:t>
             </a:fld>
             <a:endParaRPr lang="sv-SE"/>
           </a:p>
@@ -674,7 +678,7 @@
           <a:p>
             <a:fld id="{C0EB9380-D9C8-4A6F-988E-863DD0B42BDC}" type="datetimeFigureOut">
               <a:rPr lang="sv-SE" smtClean="0"/>
-              <a:t>2025-11-28</a:t>
+              <a:t>2025-12-12</a:t>
             </a:fld>
             <a:endParaRPr lang="sv-SE"/>
           </a:p>
@@ -874,7 +878,7 @@
           <a:p>
             <a:fld id="{C0EB9380-D9C8-4A6F-988E-863DD0B42BDC}" type="datetimeFigureOut">
               <a:rPr lang="sv-SE" smtClean="0"/>
-              <a:t>2025-11-28</a:t>
+              <a:t>2025-12-12</a:t>
             </a:fld>
             <a:endParaRPr lang="sv-SE"/>
           </a:p>
@@ -1150,7 +1154,7 @@
           <a:p>
             <a:fld id="{C0EB9380-D9C8-4A6F-988E-863DD0B42BDC}" type="datetimeFigureOut">
               <a:rPr lang="sv-SE" smtClean="0"/>
-              <a:t>2025-11-28</a:t>
+              <a:t>2025-12-12</a:t>
             </a:fld>
             <a:endParaRPr lang="sv-SE"/>
           </a:p>
@@ -1418,7 +1422,7 @@
           <a:p>
             <a:fld id="{C0EB9380-D9C8-4A6F-988E-863DD0B42BDC}" type="datetimeFigureOut">
               <a:rPr lang="sv-SE" smtClean="0"/>
-              <a:t>2025-11-28</a:t>
+              <a:t>2025-12-12</a:t>
             </a:fld>
             <a:endParaRPr lang="sv-SE"/>
           </a:p>
@@ -1833,7 +1837,7 @@
           <a:p>
             <a:fld id="{C0EB9380-D9C8-4A6F-988E-863DD0B42BDC}" type="datetimeFigureOut">
               <a:rPr lang="sv-SE" smtClean="0"/>
-              <a:t>2025-11-28</a:t>
+              <a:t>2025-12-12</a:t>
             </a:fld>
             <a:endParaRPr lang="sv-SE"/>
           </a:p>
@@ -1975,7 +1979,7 @@
           <a:p>
             <a:fld id="{C0EB9380-D9C8-4A6F-988E-863DD0B42BDC}" type="datetimeFigureOut">
               <a:rPr lang="sv-SE" smtClean="0"/>
-              <a:t>2025-11-28</a:t>
+              <a:t>2025-12-12</a:t>
             </a:fld>
             <a:endParaRPr lang="sv-SE"/>
           </a:p>
@@ -2088,7 +2092,7 @@
           <a:p>
             <a:fld id="{C0EB9380-D9C8-4A6F-988E-863DD0B42BDC}" type="datetimeFigureOut">
               <a:rPr lang="sv-SE" smtClean="0"/>
-              <a:t>2025-11-28</a:t>
+              <a:t>2025-12-12</a:t>
             </a:fld>
             <a:endParaRPr lang="sv-SE"/>
           </a:p>
@@ -2401,7 +2405,7 @@
           <a:p>
             <a:fld id="{C0EB9380-D9C8-4A6F-988E-863DD0B42BDC}" type="datetimeFigureOut">
               <a:rPr lang="sv-SE" smtClean="0"/>
-              <a:t>2025-11-28</a:t>
+              <a:t>2025-12-12</a:t>
             </a:fld>
             <a:endParaRPr lang="sv-SE"/>
           </a:p>
@@ -2690,7 +2694,7 @@
           <a:p>
             <a:fld id="{C0EB9380-D9C8-4A6F-988E-863DD0B42BDC}" type="datetimeFigureOut">
               <a:rPr lang="sv-SE" smtClean="0"/>
-              <a:t>2025-11-28</a:t>
+              <a:t>2025-12-12</a:t>
             </a:fld>
             <a:endParaRPr lang="sv-SE"/>
           </a:p>
@@ -2933,7 +2937,7 @@
           <a:p>
             <a:fld id="{C0EB9380-D9C8-4A6F-988E-863DD0B42BDC}" type="datetimeFigureOut">
               <a:rPr lang="sv-SE" smtClean="0"/>
-              <a:t>2025-11-28</a:t>
+              <a:t>2025-12-12</a:t>
             </a:fld>
             <a:endParaRPr lang="sv-SE"/>
           </a:p>
@@ -3615,6 +3619,2688 @@
     <p:extLst>
       <p:ext uri="{BB962C8B-B14F-4D97-AF65-F5344CB8AC3E}">
         <p14:creationId xmlns:p14="http://schemas.microsoft.com/office/powerpoint/2010/main" val="3739807844"/>
+      </p:ext>
+    </p:extLst>
+  </p:cSld>
+  <p:clrMapOvr>
+    <a:masterClrMapping/>
+  </p:clrMapOvr>
+</p:sld>
+</file>
+
+<file path=ppt/slides/slide5.xml><?xml version="1.0" encoding="utf-8"?>
+<p:sld xmlns:a="http://schemas.openxmlformats.org/drawingml/2006/main" xmlns:r="http://schemas.openxmlformats.org/officeDocument/2006/relationships" xmlns:p="http://schemas.openxmlformats.org/presentationml/2006/main">
+  <p:cSld>
+    <p:spTree>
+      <p:nvGrpSpPr>
+        <p:cNvPr id="1" name=""/>
+        <p:cNvGrpSpPr/>
+        <p:nvPr/>
+      </p:nvGrpSpPr>
+      <p:grpSpPr>
+        <a:xfrm>
+          <a:off x="0" y="0"/>
+          <a:ext cx="0" cy="0"/>
+          <a:chOff x="0" y="0"/>
+          <a:chExt cx="0" cy="0"/>
+        </a:xfrm>
+      </p:grpSpPr>
+      <p:pic>
+        <p:nvPicPr>
+          <p:cNvPr id="5" name="Picture 4">
+            <a:extLst>
+              <a:ext uri="{FF2B5EF4-FFF2-40B4-BE49-F238E27FC236}">
+                <a16:creationId xmlns:a16="http://schemas.microsoft.com/office/drawing/2014/main" id="{240D9D76-CB3B-D7F8-83F2-8D1D377FA5E1}"/>
+              </a:ext>
+            </a:extLst>
+          </p:cNvPr>
+          <p:cNvPicPr>
+            <a:picLocks noChangeAspect="1"/>
+          </p:cNvPicPr>
+          <p:nvPr/>
+        </p:nvPicPr>
+        <p:blipFill>
+          <a:blip r:embed="rId2">
+            <a:extLst>
+              <a:ext uri="{28A0092B-C50C-407E-A947-70E740481C1C}">
+                <a14:useLocalDpi xmlns:a14="http://schemas.microsoft.com/office/drawing/2010/main" val="0"/>
+              </a:ext>
+            </a:extLst>
+          </a:blip>
+          <a:srcRect b="15998"/>
+          <a:stretch>
+            <a:fillRect/>
+          </a:stretch>
+        </p:blipFill>
+        <p:spPr>
+          <a:xfrm>
+            <a:off x="1484243" y="901435"/>
+            <a:ext cx="9567495" cy="4018436"/>
+          </a:xfrm>
+          <a:prstGeom prst="rect">
+            <a:avLst/>
+          </a:prstGeom>
+        </p:spPr>
+      </p:pic>
+      <p:pic>
+        <p:nvPicPr>
+          <p:cNvPr id="1026" name="Picture 2" descr="Herring Fish silhouette illustration, Silhouette of Herring Fish clip art  47099387 Vector Art at Vecteezy">
+            <a:extLst>
+              <a:ext uri="{FF2B5EF4-FFF2-40B4-BE49-F238E27FC236}">
+                <a16:creationId xmlns:a16="http://schemas.microsoft.com/office/drawing/2014/main" id="{7F299A01-EBA0-BDCC-F732-E4FC95F318D4}"/>
+              </a:ext>
+            </a:extLst>
+          </p:cNvPr>
+          <p:cNvPicPr>
+            <a:picLocks noChangeAspect="1" noChangeArrowheads="1"/>
+          </p:cNvPicPr>
+          <p:nvPr/>
+        </p:nvPicPr>
+        <p:blipFill>
+          <a:blip r:embed="rId3">
+            <a:duotone>
+              <a:schemeClr val="accent2">
+                <a:shade val="45000"/>
+                <a:satMod val="135000"/>
+              </a:schemeClr>
+              <a:prstClr val="white"/>
+            </a:duotone>
+            <a:extLst>
+              <a:ext uri="{BEBA8EAE-BF5A-486C-A8C5-ECC9F3942E4B}">
+                <a14:imgProps xmlns:a14="http://schemas.microsoft.com/office/drawing/2010/main">
+                  <a14:imgLayer r:embed="rId4">
+                    <a14:imgEffect>
+                      <a14:backgroundRemoval t="10000" b="90000" l="6922" r="93672">
+                        <a14:foregroundMark x1="8570" y1="44082" x2="12129" y2="51020"/>
+                        <a14:foregroundMark x1="9624" y1="61633" x2="7119" y2="64388"/>
+                        <a14:foregroundMark x1="91562" y1="47653" x2="89387" y2="48878"/>
+                        <a14:foregroundMark x1="92947" y1="54082" x2="91892" y2="54490"/>
+                        <a14:foregroundMark x1="93672" y1="48265" x2="92881" y2="48265"/>
+                      </a14:backgroundRemoval>
+                    </a14:imgEffect>
+                  </a14:imgLayer>
+                </a14:imgProps>
+              </a:ext>
+              <a:ext uri="{28A0092B-C50C-407E-A947-70E740481C1C}">
+                <a14:useLocalDpi xmlns:a14="http://schemas.microsoft.com/office/drawing/2010/main" val="0"/>
+              </a:ext>
+            </a:extLst>
+          </a:blip>
+          <a:srcRect/>
+          <a:stretch>
+            <a:fillRect/>
+          </a:stretch>
+        </p:blipFill>
+        <p:spPr bwMode="auto">
+          <a:xfrm>
+            <a:off x="2076083" y="1172819"/>
+            <a:ext cx="553856" cy="357807"/>
+          </a:xfrm>
+          <a:prstGeom prst="rect">
+            <a:avLst/>
+          </a:prstGeom>
+          <a:noFill/>
+          <a:extLst>
+            <a:ext uri="{909E8E84-426E-40DD-AFC4-6F175D3DCCD1}">
+              <a14:hiddenFill xmlns:a14="http://schemas.microsoft.com/office/drawing/2010/main">
+                <a:solidFill>
+                  <a:srgbClr val="FFFFFF"/>
+                </a:solidFill>
+              </a14:hiddenFill>
+            </a:ext>
+          </a:extLst>
+        </p:spPr>
+      </p:pic>
+      <p:pic>
+        <p:nvPicPr>
+          <p:cNvPr id="10" name="Picture 2" descr="Herring Fish silhouette illustration, Silhouette of Herring Fish clip art  47099387 Vector Art at Vecteezy">
+            <a:extLst>
+              <a:ext uri="{FF2B5EF4-FFF2-40B4-BE49-F238E27FC236}">
+                <a16:creationId xmlns:a16="http://schemas.microsoft.com/office/drawing/2014/main" id="{869676E6-9F02-12E6-B3DB-F1790D4A5735}"/>
+              </a:ext>
+            </a:extLst>
+          </p:cNvPr>
+          <p:cNvPicPr>
+            <a:picLocks noChangeAspect="1" noChangeArrowheads="1"/>
+          </p:cNvPicPr>
+          <p:nvPr/>
+        </p:nvPicPr>
+        <p:blipFill>
+          <a:blip r:embed="rId3">
+            <a:duotone>
+              <a:schemeClr val="accent6">
+                <a:shade val="45000"/>
+                <a:satMod val="135000"/>
+              </a:schemeClr>
+              <a:prstClr val="white"/>
+            </a:duotone>
+            <a:extLst>
+              <a:ext uri="{BEBA8EAE-BF5A-486C-A8C5-ECC9F3942E4B}">
+                <a14:imgProps xmlns:a14="http://schemas.microsoft.com/office/drawing/2010/main">
+                  <a14:imgLayer r:embed="rId4">
+                    <a14:imgEffect>
+                      <a14:backgroundRemoval t="10000" b="90000" l="6922" r="93672">
+                        <a14:foregroundMark x1="8570" y1="44082" x2="12129" y2="51020"/>
+                        <a14:foregroundMark x1="9624" y1="61633" x2="7119" y2="64388"/>
+                        <a14:foregroundMark x1="91562" y1="47653" x2="89387" y2="48878"/>
+                        <a14:foregroundMark x1="92947" y1="54082" x2="91892" y2="54490"/>
+                        <a14:foregroundMark x1="93672" y1="48265" x2="92881" y2="48265"/>
+                      </a14:backgroundRemoval>
+                    </a14:imgEffect>
+                  </a14:imgLayer>
+                </a14:imgProps>
+              </a:ext>
+              <a:ext uri="{28A0092B-C50C-407E-A947-70E740481C1C}">
+                <a14:useLocalDpi xmlns:a14="http://schemas.microsoft.com/office/drawing/2010/main" val="0"/>
+              </a:ext>
+            </a:extLst>
+          </a:blip>
+          <a:srcRect/>
+          <a:stretch>
+            <a:fillRect/>
+          </a:stretch>
+        </p:blipFill>
+        <p:spPr bwMode="auto">
+          <a:xfrm>
+            <a:off x="2076083" y="2378767"/>
+            <a:ext cx="553856" cy="357807"/>
+          </a:xfrm>
+          <a:prstGeom prst="rect">
+            <a:avLst/>
+          </a:prstGeom>
+          <a:noFill/>
+          <a:extLst>
+            <a:ext uri="{909E8E84-426E-40DD-AFC4-6F175D3DCCD1}">
+              <a14:hiddenFill xmlns:a14="http://schemas.microsoft.com/office/drawing/2010/main">
+                <a:solidFill>
+                  <a:srgbClr val="FFFFFF"/>
+                </a:solidFill>
+              </a14:hiddenFill>
+            </a:ext>
+          </a:extLst>
+        </p:spPr>
+      </p:pic>
+      <p:pic>
+        <p:nvPicPr>
+          <p:cNvPr id="15" name="Picture 2" descr="Herring Fish silhouette illustration, Silhouette of Herring Fish clip art  47099387 Vector Art at Vecteezy">
+            <a:extLst>
+              <a:ext uri="{FF2B5EF4-FFF2-40B4-BE49-F238E27FC236}">
+                <a16:creationId xmlns:a16="http://schemas.microsoft.com/office/drawing/2014/main" id="{517069B4-87A7-D9C1-8907-D351D03F54C2}"/>
+              </a:ext>
+            </a:extLst>
+          </p:cNvPr>
+          <p:cNvPicPr>
+            <a:picLocks noChangeAspect="1" noChangeArrowheads="1"/>
+          </p:cNvPicPr>
+          <p:nvPr/>
+        </p:nvPicPr>
+        <p:blipFill>
+          <a:blip r:embed="rId3">
+            <a:duotone>
+              <a:schemeClr val="accent2">
+                <a:shade val="45000"/>
+                <a:satMod val="135000"/>
+              </a:schemeClr>
+              <a:prstClr val="white"/>
+            </a:duotone>
+            <a:extLst>
+              <a:ext uri="{BEBA8EAE-BF5A-486C-A8C5-ECC9F3942E4B}">
+                <a14:imgProps xmlns:a14="http://schemas.microsoft.com/office/drawing/2010/main">
+                  <a14:imgLayer r:embed="rId4">
+                    <a14:imgEffect>
+                      <a14:backgroundRemoval t="10000" b="90000" l="6922" r="93672">
+                        <a14:foregroundMark x1="8570" y1="44082" x2="12129" y2="51020"/>
+                        <a14:foregroundMark x1="9624" y1="61633" x2="7119" y2="64388"/>
+                        <a14:foregroundMark x1="91562" y1="47653" x2="89387" y2="48878"/>
+                        <a14:foregroundMark x1="92947" y1="54082" x2="91892" y2="54490"/>
+                        <a14:foregroundMark x1="93672" y1="48265" x2="92881" y2="48265"/>
+                      </a14:backgroundRemoval>
+                    </a14:imgEffect>
+                  </a14:imgLayer>
+                </a14:imgProps>
+              </a:ext>
+              <a:ext uri="{28A0092B-C50C-407E-A947-70E740481C1C}">
+                <a14:useLocalDpi xmlns:a14="http://schemas.microsoft.com/office/drawing/2010/main" val="0"/>
+              </a:ext>
+            </a:extLst>
+          </a:blip>
+          <a:srcRect/>
+          <a:stretch>
+            <a:fillRect/>
+          </a:stretch>
+        </p:blipFill>
+        <p:spPr bwMode="auto">
+          <a:xfrm>
+            <a:off x="2072152" y="2826026"/>
+            <a:ext cx="553856" cy="357807"/>
+          </a:xfrm>
+          <a:prstGeom prst="rect">
+            <a:avLst/>
+          </a:prstGeom>
+          <a:noFill/>
+          <a:extLst>
+            <a:ext uri="{909E8E84-426E-40DD-AFC4-6F175D3DCCD1}">
+              <a14:hiddenFill xmlns:a14="http://schemas.microsoft.com/office/drawing/2010/main">
+                <a:solidFill>
+                  <a:srgbClr val="FFFFFF"/>
+                </a:solidFill>
+              </a14:hiddenFill>
+            </a:ext>
+          </a:extLst>
+        </p:spPr>
+      </p:pic>
+      <p:pic>
+        <p:nvPicPr>
+          <p:cNvPr id="16" name="Picture 2" descr="Herring Fish silhouette illustration, Silhouette of Herring Fish clip art  47099387 Vector Art at Vecteezy">
+            <a:extLst>
+              <a:ext uri="{FF2B5EF4-FFF2-40B4-BE49-F238E27FC236}">
+                <a16:creationId xmlns:a16="http://schemas.microsoft.com/office/drawing/2014/main" id="{B56D8D39-E602-8AAC-6543-0A943D2122FA}"/>
+              </a:ext>
+            </a:extLst>
+          </p:cNvPr>
+          <p:cNvPicPr>
+            <a:picLocks noChangeAspect="1" noChangeArrowheads="1"/>
+          </p:cNvPicPr>
+          <p:nvPr/>
+        </p:nvPicPr>
+        <p:blipFill>
+          <a:blip r:embed="rId3">
+            <a:duotone>
+              <a:schemeClr val="accent6">
+                <a:shade val="45000"/>
+                <a:satMod val="135000"/>
+              </a:schemeClr>
+              <a:prstClr val="white"/>
+            </a:duotone>
+            <a:extLst>
+              <a:ext uri="{BEBA8EAE-BF5A-486C-A8C5-ECC9F3942E4B}">
+                <a14:imgProps xmlns:a14="http://schemas.microsoft.com/office/drawing/2010/main">
+                  <a14:imgLayer r:embed="rId4">
+                    <a14:imgEffect>
+                      <a14:backgroundRemoval t="10000" b="90000" l="6922" r="93672">
+                        <a14:foregroundMark x1="8570" y1="44082" x2="12129" y2="51020"/>
+                        <a14:foregroundMark x1="9624" y1="61633" x2="7119" y2="64388"/>
+                        <a14:foregroundMark x1="91562" y1="47653" x2="89387" y2="48878"/>
+                        <a14:foregroundMark x1="92947" y1="54082" x2="91892" y2="54490"/>
+                        <a14:foregroundMark x1="93672" y1="48265" x2="92881" y2="48265"/>
+                      </a14:backgroundRemoval>
+                    </a14:imgEffect>
+                  </a14:imgLayer>
+                </a14:imgProps>
+              </a:ext>
+              <a:ext uri="{28A0092B-C50C-407E-A947-70E740481C1C}">
+                <a14:useLocalDpi xmlns:a14="http://schemas.microsoft.com/office/drawing/2010/main" val="0"/>
+              </a:ext>
+            </a:extLst>
+          </a:blip>
+          <a:srcRect/>
+          <a:stretch>
+            <a:fillRect/>
+          </a:stretch>
+        </p:blipFill>
+        <p:spPr bwMode="auto">
+          <a:xfrm>
+            <a:off x="2072152" y="4031974"/>
+            <a:ext cx="553856" cy="357807"/>
+          </a:xfrm>
+          <a:prstGeom prst="rect">
+            <a:avLst/>
+          </a:prstGeom>
+          <a:noFill/>
+          <a:extLst>
+            <a:ext uri="{909E8E84-426E-40DD-AFC4-6F175D3DCCD1}">
+              <a14:hiddenFill xmlns:a14="http://schemas.microsoft.com/office/drawing/2010/main">
+                <a:solidFill>
+                  <a:srgbClr val="FFFFFF"/>
+                </a:solidFill>
+              </a14:hiddenFill>
+            </a:ext>
+          </a:extLst>
+        </p:spPr>
+      </p:pic>
+      <p:pic>
+        <p:nvPicPr>
+          <p:cNvPr id="18" name="Picture 2" descr="Herring Fish silhouette illustration, Silhouette of Herring Fish clip art  47099387 Vector Art at Vecteezy">
+            <a:extLst>
+              <a:ext uri="{FF2B5EF4-FFF2-40B4-BE49-F238E27FC236}">
+                <a16:creationId xmlns:a16="http://schemas.microsoft.com/office/drawing/2014/main" id="{2A09660E-3F18-81F9-01DC-40911FF5FC02}"/>
+              </a:ext>
+            </a:extLst>
+          </p:cNvPr>
+          <p:cNvPicPr>
+            <a:picLocks noChangeAspect="1" noChangeArrowheads="1"/>
+          </p:cNvPicPr>
+          <p:nvPr/>
+        </p:nvPicPr>
+        <p:blipFill>
+          <a:blip r:embed="rId3">
+            <a:duotone>
+              <a:schemeClr val="accent6">
+                <a:shade val="45000"/>
+                <a:satMod val="135000"/>
+              </a:schemeClr>
+              <a:prstClr val="white"/>
+            </a:duotone>
+            <a:extLst>
+              <a:ext uri="{BEBA8EAE-BF5A-486C-A8C5-ECC9F3942E4B}">
+                <a14:imgProps xmlns:a14="http://schemas.microsoft.com/office/drawing/2010/main">
+                  <a14:imgLayer r:embed="rId4">
+                    <a14:imgEffect>
+                      <a14:backgroundRemoval t="10000" b="90000" l="6922" r="93672">
+                        <a14:foregroundMark x1="8570" y1="44082" x2="12129" y2="51020"/>
+                        <a14:foregroundMark x1="9624" y1="61633" x2="7119" y2="64388"/>
+                        <a14:foregroundMark x1="91562" y1="47653" x2="89387" y2="48878"/>
+                        <a14:foregroundMark x1="92947" y1="54082" x2="91892" y2="54490"/>
+                        <a14:foregroundMark x1="93672" y1="48265" x2="92881" y2="48265"/>
+                      </a14:backgroundRemoval>
+                    </a14:imgEffect>
+                  </a14:imgLayer>
+                </a14:imgProps>
+              </a:ext>
+              <a:ext uri="{28A0092B-C50C-407E-A947-70E740481C1C}">
+                <a14:useLocalDpi xmlns:a14="http://schemas.microsoft.com/office/drawing/2010/main" val="0"/>
+              </a:ext>
+            </a:extLst>
+          </a:blip>
+          <a:srcRect/>
+          <a:stretch>
+            <a:fillRect/>
+          </a:stretch>
+        </p:blipFill>
+        <p:spPr bwMode="auto">
+          <a:xfrm>
+            <a:off x="4714413" y="4919871"/>
+            <a:ext cx="553856" cy="357807"/>
+          </a:xfrm>
+          <a:prstGeom prst="rect">
+            <a:avLst/>
+          </a:prstGeom>
+          <a:noFill/>
+          <a:extLst>
+            <a:ext uri="{909E8E84-426E-40DD-AFC4-6F175D3DCCD1}">
+              <a14:hiddenFill xmlns:a14="http://schemas.microsoft.com/office/drawing/2010/main">
+                <a:solidFill>
+                  <a:srgbClr val="FFFFFF"/>
+                </a:solidFill>
+              </a14:hiddenFill>
+            </a:ext>
+          </a:extLst>
+        </p:spPr>
+      </p:pic>
+      <p:pic>
+        <p:nvPicPr>
+          <p:cNvPr id="19" name="Picture 2" descr="Herring Fish silhouette illustration, Silhouette of Herring Fish clip art  47099387 Vector Art at Vecteezy">
+            <a:extLst>
+              <a:ext uri="{FF2B5EF4-FFF2-40B4-BE49-F238E27FC236}">
+                <a16:creationId xmlns:a16="http://schemas.microsoft.com/office/drawing/2014/main" id="{22E2439E-A76E-6CCE-EDCD-8A5E51D7C4C1}"/>
+              </a:ext>
+            </a:extLst>
+          </p:cNvPr>
+          <p:cNvPicPr>
+            <a:picLocks noChangeAspect="1" noChangeArrowheads="1"/>
+          </p:cNvPicPr>
+          <p:nvPr/>
+        </p:nvPicPr>
+        <p:blipFill>
+          <a:blip r:embed="rId3">
+            <a:duotone>
+              <a:schemeClr val="accent2">
+                <a:shade val="45000"/>
+                <a:satMod val="135000"/>
+              </a:schemeClr>
+              <a:prstClr val="white"/>
+            </a:duotone>
+            <a:extLst>
+              <a:ext uri="{BEBA8EAE-BF5A-486C-A8C5-ECC9F3942E4B}">
+                <a14:imgProps xmlns:a14="http://schemas.microsoft.com/office/drawing/2010/main">
+                  <a14:imgLayer r:embed="rId4">
+                    <a14:imgEffect>
+                      <a14:backgroundRemoval t="10000" b="90000" l="6922" r="93672">
+                        <a14:foregroundMark x1="8570" y1="44082" x2="12129" y2="51020"/>
+                        <a14:foregroundMark x1="9624" y1="61633" x2="7119" y2="64388"/>
+                        <a14:foregroundMark x1="91562" y1="47653" x2="89387" y2="48878"/>
+                        <a14:foregroundMark x1="92947" y1="54082" x2="91892" y2="54490"/>
+                        <a14:foregroundMark x1="93672" y1="48265" x2="92881" y2="48265"/>
+                      </a14:backgroundRemoval>
+                    </a14:imgEffect>
+                  </a14:imgLayer>
+                </a14:imgProps>
+              </a:ext>
+              <a:ext uri="{28A0092B-C50C-407E-A947-70E740481C1C}">
+                <a14:useLocalDpi xmlns:a14="http://schemas.microsoft.com/office/drawing/2010/main" val="0"/>
+              </a:ext>
+            </a:extLst>
+          </a:blip>
+          <a:srcRect/>
+          <a:stretch>
+            <a:fillRect/>
+          </a:stretch>
+        </p:blipFill>
+        <p:spPr bwMode="auto">
+          <a:xfrm>
+            <a:off x="3426998" y="4921483"/>
+            <a:ext cx="553856" cy="357807"/>
+          </a:xfrm>
+          <a:prstGeom prst="rect">
+            <a:avLst/>
+          </a:prstGeom>
+          <a:noFill/>
+          <a:extLst>
+            <a:ext uri="{909E8E84-426E-40DD-AFC4-6F175D3DCCD1}">
+              <a14:hiddenFill xmlns:a14="http://schemas.microsoft.com/office/drawing/2010/main">
+                <a:solidFill>
+                  <a:srgbClr val="FFFFFF"/>
+                </a:solidFill>
+              </a14:hiddenFill>
+            </a:ext>
+          </a:extLst>
+        </p:spPr>
+      </p:pic>
+      <p:pic>
+        <p:nvPicPr>
+          <p:cNvPr id="20" name="Picture 19">
+            <a:extLst>
+              <a:ext uri="{FF2B5EF4-FFF2-40B4-BE49-F238E27FC236}">
+                <a16:creationId xmlns:a16="http://schemas.microsoft.com/office/drawing/2014/main" id="{1F553DE3-3EA7-770E-3110-54254938DDD8}"/>
+              </a:ext>
+            </a:extLst>
+          </p:cNvPr>
+          <p:cNvPicPr>
+            <a:picLocks noChangeAspect="1"/>
+          </p:cNvPicPr>
+          <p:nvPr/>
+        </p:nvPicPr>
+        <p:blipFill>
+          <a:blip r:embed="rId2">
+            <a:extLst>
+              <a:ext uri="{28A0092B-C50C-407E-A947-70E740481C1C}">
+                <a14:useLocalDpi xmlns:a14="http://schemas.microsoft.com/office/drawing/2010/main" val="0"/>
+              </a:ext>
+            </a:extLst>
+          </a:blip>
+          <a:srcRect l="35582" t="84758" r="30967"/>
+          <a:stretch>
+            <a:fillRect/>
+          </a:stretch>
+        </p:blipFill>
+        <p:spPr>
+          <a:xfrm>
+            <a:off x="7384774" y="4753216"/>
+            <a:ext cx="3200400" cy="729156"/>
+          </a:xfrm>
+          <a:prstGeom prst="rect">
+            <a:avLst/>
+          </a:prstGeom>
+        </p:spPr>
+      </p:pic>
+      <p:sp>
+        <p:nvSpPr>
+          <p:cNvPr id="21" name="TextBox 20">
+            <a:extLst>
+              <a:ext uri="{FF2B5EF4-FFF2-40B4-BE49-F238E27FC236}">
+                <a16:creationId xmlns:a16="http://schemas.microsoft.com/office/drawing/2014/main" id="{053FB246-06F7-598A-F54F-3C0220526CEA}"/>
+              </a:ext>
+            </a:extLst>
+          </p:cNvPr>
+          <p:cNvSpPr txBox="1"/>
+          <p:nvPr/>
+        </p:nvSpPr>
+        <p:spPr>
+          <a:xfrm>
+            <a:off x="2072152" y="4960925"/>
+            <a:ext cx="1143839" cy="307777"/>
+          </a:xfrm>
+          <a:prstGeom prst="rect">
+            <a:avLst/>
+          </a:prstGeom>
+          <a:noFill/>
+        </p:spPr>
+        <p:txBody>
+          <a:bodyPr wrap="none" rtlCol="0">
+            <a:spAutoFit/>
+          </a:bodyPr>
+          <a:lstStyle/>
+          <a:p>
+            <a:r>
+              <a:rPr lang="sv-SE" sz="1400" dirty="0"/>
+              <a:t>Stock status</a:t>
+            </a:r>
+          </a:p>
+        </p:txBody>
+      </p:sp>
+      <p:sp>
+        <p:nvSpPr>
+          <p:cNvPr id="22" name="TextBox 21">
+            <a:extLst>
+              <a:ext uri="{FF2B5EF4-FFF2-40B4-BE49-F238E27FC236}">
+                <a16:creationId xmlns:a16="http://schemas.microsoft.com/office/drawing/2014/main" id="{A605C842-A983-F53B-6E82-F34E684D35E3}"/>
+              </a:ext>
+            </a:extLst>
+          </p:cNvPr>
+          <p:cNvSpPr txBox="1"/>
+          <p:nvPr/>
+        </p:nvSpPr>
+        <p:spPr>
+          <a:xfrm>
+            <a:off x="3954515" y="4960925"/>
+            <a:ext cx="585673" cy="276999"/>
+          </a:xfrm>
+          <a:prstGeom prst="rect">
+            <a:avLst/>
+          </a:prstGeom>
+          <a:noFill/>
+        </p:spPr>
+        <p:txBody>
+          <a:bodyPr wrap="none" rtlCol="0">
+            <a:spAutoFit/>
+          </a:bodyPr>
+          <a:lstStyle/>
+          <a:p>
+            <a:r>
+              <a:rPr lang="sv-SE" sz="1200" dirty="0" err="1"/>
+              <a:t>worse</a:t>
+            </a:r>
+            <a:endParaRPr lang="sv-SE" sz="1200" dirty="0"/>
+          </a:p>
+        </p:txBody>
+      </p:sp>
+      <p:sp>
+        <p:nvSpPr>
+          <p:cNvPr id="23" name="TextBox 22">
+            <a:extLst>
+              <a:ext uri="{FF2B5EF4-FFF2-40B4-BE49-F238E27FC236}">
+                <a16:creationId xmlns:a16="http://schemas.microsoft.com/office/drawing/2014/main" id="{013FCCC0-F972-15CF-1EEF-D0517962E005}"/>
+              </a:ext>
+            </a:extLst>
+          </p:cNvPr>
+          <p:cNvSpPr txBox="1"/>
+          <p:nvPr/>
+        </p:nvSpPr>
+        <p:spPr>
+          <a:xfrm>
+            <a:off x="5231923" y="4970859"/>
+            <a:ext cx="584647" cy="276999"/>
+          </a:xfrm>
+          <a:prstGeom prst="rect">
+            <a:avLst/>
+          </a:prstGeom>
+          <a:noFill/>
+        </p:spPr>
+        <p:txBody>
+          <a:bodyPr wrap="none" rtlCol="0">
+            <a:spAutoFit/>
+          </a:bodyPr>
+          <a:lstStyle/>
+          <a:p>
+            <a:r>
+              <a:rPr lang="sv-SE" sz="1200" dirty="0" err="1"/>
+              <a:t>better</a:t>
+            </a:r>
+            <a:endParaRPr lang="sv-SE" sz="1400" dirty="0"/>
+          </a:p>
+        </p:txBody>
+      </p:sp>
+    </p:spTree>
+    <p:extLst>
+      <p:ext uri="{BB962C8B-B14F-4D97-AF65-F5344CB8AC3E}">
+        <p14:creationId xmlns:p14="http://schemas.microsoft.com/office/powerpoint/2010/main" val="2199517892"/>
+      </p:ext>
+    </p:extLst>
+  </p:cSld>
+  <p:clrMapOvr>
+    <a:masterClrMapping/>
+  </p:clrMapOvr>
+</p:sld>
+</file>
+
+<file path=ppt/slides/slide6.xml><?xml version="1.0" encoding="utf-8"?>
+<p:sld xmlns:a="http://schemas.openxmlformats.org/drawingml/2006/main" xmlns:r="http://schemas.openxmlformats.org/officeDocument/2006/relationships" xmlns:p="http://schemas.openxmlformats.org/presentationml/2006/main">
+  <p:cSld>
+    <p:spTree>
+      <p:nvGrpSpPr>
+        <p:cNvPr id="1" name=""/>
+        <p:cNvGrpSpPr/>
+        <p:nvPr/>
+      </p:nvGrpSpPr>
+      <p:grpSpPr>
+        <a:xfrm>
+          <a:off x="0" y="0"/>
+          <a:ext cx="0" cy="0"/>
+          <a:chOff x="0" y="0"/>
+          <a:chExt cx="0" cy="0"/>
+        </a:xfrm>
+      </p:grpSpPr>
+      <p:sp>
+        <p:nvSpPr>
+          <p:cNvPr id="2" name="Title 1">
+            <a:extLst>
+              <a:ext uri="{FF2B5EF4-FFF2-40B4-BE49-F238E27FC236}">
+                <a16:creationId xmlns:a16="http://schemas.microsoft.com/office/drawing/2014/main" id="{C05AEDF6-EFD7-33D0-B8EA-26E4C91E6DC1}"/>
+              </a:ext>
+            </a:extLst>
+          </p:cNvPr>
+          <p:cNvSpPr>
+            <a:spLocks noGrp="1"/>
+          </p:cNvSpPr>
+          <p:nvPr>
+            <p:ph type="title"/>
+          </p:nvPr>
+        </p:nvSpPr>
+        <p:spPr/>
+        <p:txBody>
+          <a:bodyPr/>
+          <a:lstStyle/>
+          <a:p>
+            <a:endParaRPr lang="sv-SE"/>
+          </a:p>
+        </p:txBody>
+      </p:sp>
+      <p:pic>
+        <p:nvPicPr>
+          <p:cNvPr id="4" name="Picture 3">
+            <a:extLst>
+              <a:ext uri="{FF2B5EF4-FFF2-40B4-BE49-F238E27FC236}">
+                <a16:creationId xmlns:a16="http://schemas.microsoft.com/office/drawing/2014/main" id="{38E97C9E-F3EA-114E-1C61-13A1271B5BFB}"/>
+              </a:ext>
+            </a:extLst>
+          </p:cNvPr>
+          <p:cNvPicPr>
+            <a:picLocks noChangeAspect="1"/>
+          </p:cNvPicPr>
+          <p:nvPr/>
+        </p:nvPicPr>
+        <p:blipFill>
+          <a:blip r:embed="rId2"/>
+          <a:stretch>
+            <a:fillRect/>
+          </a:stretch>
+        </p:blipFill>
+        <p:spPr>
+          <a:xfrm>
+            <a:off x="1310225" y="1139753"/>
+            <a:ext cx="9571550" cy="4578493"/>
+          </a:xfrm>
+          <a:prstGeom prst="rect">
+            <a:avLst/>
+          </a:prstGeom>
+        </p:spPr>
+      </p:pic>
+    </p:spTree>
+    <p:extLst>
+      <p:ext uri="{BB962C8B-B14F-4D97-AF65-F5344CB8AC3E}">
+        <p14:creationId xmlns:p14="http://schemas.microsoft.com/office/powerpoint/2010/main" val="3075612971"/>
+      </p:ext>
+    </p:extLst>
+  </p:cSld>
+  <p:clrMapOvr>
+    <a:masterClrMapping/>
+  </p:clrMapOvr>
+</p:sld>
+</file>
+
+<file path=ppt/slides/slide7.xml><?xml version="1.0" encoding="utf-8"?>
+<p:sld xmlns:a="http://schemas.openxmlformats.org/drawingml/2006/main" xmlns:r="http://schemas.openxmlformats.org/officeDocument/2006/relationships" xmlns:p="http://schemas.openxmlformats.org/presentationml/2006/main">
+  <p:cSld>
+    <p:spTree>
+      <p:nvGrpSpPr>
+        <p:cNvPr id="1" name=""/>
+        <p:cNvGrpSpPr/>
+        <p:nvPr/>
+      </p:nvGrpSpPr>
+      <p:grpSpPr>
+        <a:xfrm>
+          <a:off x="0" y="0"/>
+          <a:ext cx="0" cy="0"/>
+          <a:chOff x="0" y="0"/>
+          <a:chExt cx="0" cy="0"/>
+        </a:xfrm>
+      </p:grpSpPr>
+      <p:sp>
+        <p:nvSpPr>
+          <p:cNvPr id="16" name="Rectangle 15">
+            <a:extLst>
+              <a:ext uri="{FF2B5EF4-FFF2-40B4-BE49-F238E27FC236}">
+                <a16:creationId xmlns:a16="http://schemas.microsoft.com/office/drawing/2014/main" id="{925C1613-2D2D-4AAC-9FD8-6590983E9FAF}"/>
+              </a:ext>
+            </a:extLst>
+          </p:cNvPr>
+          <p:cNvSpPr/>
+          <p:nvPr/>
+        </p:nvSpPr>
+        <p:spPr>
+          <a:xfrm>
+            <a:off x="-1374045" y="5058089"/>
+            <a:ext cx="11262167" cy="3146033"/>
+          </a:xfrm>
+          <a:prstGeom prst="rect">
+            <a:avLst/>
+          </a:prstGeom>
+          <a:solidFill>
+            <a:schemeClr val="bg1"/>
+          </a:solidFill>
+        </p:spPr>
+        <p:style>
+          <a:lnRef idx="2">
+            <a:schemeClr val="accent1">
+              <a:shade val="15000"/>
+            </a:schemeClr>
+          </a:lnRef>
+          <a:fillRef idx="1">
+            <a:schemeClr val="accent1"/>
+          </a:fillRef>
+          <a:effectRef idx="0">
+            <a:schemeClr val="accent1"/>
+          </a:effectRef>
+          <a:fontRef idx="minor">
+            <a:schemeClr val="lt1"/>
+          </a:fontRef>
+        </p:style>
+        <p:txBody>
+          <a:bodyPr rtlCol="0" anchor="ctr"/>
+          <a:lstStyle/>
+          <a:p>
+            <a:pPr algn="ctr"/>
+            <a:endParaRPr lang="sv-SE"/>
+          </a:p>
+        </p:txBody>
+      </p:sp>
+      <p:sp>
+        <p:nvSpPr>
+          <p:cNvPr id="15" name="Rectangle 14">
+            <a:extLst>
+              <a:ext uri="{FF2B5EF4-FFF2-40B4-BE49-F238E27FC236}">
+                <a16:creationId xmlns:a16="http://schemas.microsoft.com/office/drawing/2014/main" id="{46CAB0F5-9C95-D8C9-F0D3-C08DA2BD4A18}"/>
+              </a:ext>
+            </a:extLst>
+          </p:cNvPr>
+          <p:cNvSpPr/>
+          <p:nvPr/>
+        </p:nvSpPr>
+        <p:spPr>
+          <a:xfrm>
+            <a:off x="-1374044" y="2439846"/>
+            <a:ext cx="11262167" cy="2618836"/>
+          </a:xfrm>
+          <a:prstGeom prst="rect">
+            <a:avLst/>
+          </a:prstGeom>
+          <a:solidFill>
+            <a:schemeClr val="bg1">
+              <a:lumMod val="95000"/>
+            </a:schemeClr>
+          </a:solidFill>
+        </p:spPr>
+        <p:style>
+          <a:lnRef idx="2">
+            <a:schemeClr val="accent1">
+              <a:shade val="15000"/>
+            </a:schemeClr>
+          </a:lnRef>
+          <a:fillRef idx="1">
+            <a:schemeClr val="accent1"/>
+          </a:fillRef>
+          <a:effectRef idx="0">
+            <a:schemeClr val="accent1"/>
+          </a:effectRef>
+          <a:fontRef idx="minor">
+            <a:schemeClr val="lt1"/>
+          </a:fontRef>
+        </p:style>
+        <p:txBody>
+          <a:bodyPr rtlCol="0" anchor="ctr"/>
+          <a:lstStyle/>
+          <a:p>
+            <a:pPr algn="ctr"/>
+            <a:endParaRPr lang="sv-SE"/>
+          </a:p>
+        </p:txBody>
+      </p:sp>
+      <p:sp>
+        <p:nvSpPr>
+          <p:cNvPr id="14" name="Rectangle 13">
+            <a:extLst>
+              <a:ext uri="{FF2B5EF4-FFF2-40B4-BE49-F238E27FC236}">
+                <a16:creationId xmlns:a16="http://schemas.microsoft.com/office/drawing/2014/main" id="{264FB078-A7C6-79AD-351E-585789E07257}"/>
+              </a:ext>
+            </a:extLst>
+          </p:cNvPr>
+          <p:cNvSpPr/>
+          <p:nvPr/>
+        </p:nvSpPr>
+        <p:spPr>
+          <a:xfrm>
+            <a:off x="-1374046" y="-1452545"/>
+            <a:ext cx="11262167" cy="3896940"/>
+          </a:xfrm>
+          <a:prstGeom prst="rect">
+            <a:avLst/>
+          </a:prstGeom>
+          <a:solidFill>
+            <a:schemeClr val="bg1"/>
+          </a:solidFill>
+        </p:spPr>
+        <p:style>
+          <a:lnRef idx="2">
+            <a:schemeClr val="accent1">
+              <a:shade val="15000"/>
+            </a:schemeClr>
+          </a:lnRef>
+          <a:fillRef idx="1">
+            <a:schemeClr val="accent1"/>
+          </a:fillRef>
+          <a:effectRef idx="0">
+            <a:schemeClr val="accent1"/>
+          </a:effectRef>
+          <a:fontRef idx="minor">
+            <a:schemeClr val="lt1"/>
+          </a:fontRef>
+        </p:style>
+        <p:txBody>
+          <a:bodyPr rtlCol="0" anchor="ctr"/>
+          <a:lstStyle/>
+          <a:p>
+            <a:pPr algn="ctr"/>
+            <a:endParaRPr lang="sv-SE" dirty="0"/>
+          </a:p>
+        </p:txBody>
+      </p:sp>
+      <p:sp>
+        <p:nvSpPr>
+          <p:cNvPr id="6" name="Rectangle 5">
+            <a:extLst>
+              <a:ext uri="{FF2B5EF4-FFF2-40B4-BE49-F238E27FC236}">
+                <a16:creationId xmlns:a16="http://schemas.microsoft.com/office/drawing/2014/main" id="{12C0D018-E7D8-4D0A-2333-34047C8ED295}"/>
+              </a:ext>
+            </a:extLst>
+          </p:cNvPr>
+          <p:cNvSpPr/>
+          <p:nvPr/>
+        </p:nvSpPr>
+        <p:spPr>
+          <a:xfrm>
+            <a:off x="4559174" y="701908"/>
+            <a:ext cx="1026158" cy="1130203"/>
+          </a:xfrm>
+          <a:prstGeom prst="rect">
+            <a:avLst/>
+          </a:prstGeom>
+          <a:noFill/>
+        </p:spPr>
+        <p:style>
+          <a:lnRef idx="2">
+            <a:schemeClr val="accent1">
+              <a:shade val="15000"/>
+            </a:schemeClr>
+          </a:lnRef>
+          <a:fillRef idx="1">
+            <a:schemeClr val="accent1"/>
+          </a:fillRef>
+          <a:effectRef idx="0">
+            <a:schemeClr val="accent1"/>
+          </a:effectRef>
+          <a:fontRef idx="minor">
+            <a:schemeClr val="lt1"/>
+          </a:fontRef>
+        </p:style>
+        <p:txBody>
+          <a:bodyPr rtlCol="0" anchor="ctr"/>
+          <a:lstStyle/>
+          <a:p>
+            <a:pPr algn="ctr"/>
+            <a:endParaRPr lang="sv-SE"/>
+          </a:p>
+        </p:txBody>
+      </p:sp>
+      <p:sp>
+        <p:nvSpPr>
+          <p:cNvPr id="7" name="Rectangle 6">
+            <a:extLst>
+              <a:ext uri="{FF2B5EF4-FFF2-40B4-BE49-F238E27FC236}">
+                <a16:creationId xmlns:a16="http://schemas.microsoft.com/office/drawing/2014/main" id="{1375BE4D-FE74-6149-638D-137F3CF05F44}"/>
+              </a:ext>
+            </a:extLst>
+          </p:cNvPr>
+          <p:cNvSpPr/>
+          <p:nvPr/>
+        </p:nvSpPr>
+        <p:spPr>
+          <a:xfrm>
+            <a:off x="4559173" y="3290070"/>
+            <a:ext cx="1026159" cy="884018"/>
+          </a:xfrm>
+          <a:prstGeom prst="rect">
+            <a:avLst/>
+          </a:prstGeom>
+          <a:noFill/>
+        </p:spPr>
+        <p:style>
+          <a:lnRef idx="2">
+            <a:schemeClr val="accent1">
+              <a:shade val="15000"/>
+            </a:schemeClr>
+          </a:lnRef>
+          <a:fillRef idx="1">
+            <a:schemeClr val="accent1"/>
+          </a:fillRef>
+          <a:effectRef idx="0">
+            <a:schemeClr val="accent1"/>
+          </a:effectRef>
+          <a:fontRef idx="minor">
+            <a:schemeClr val="lt1"/>
+          </a:fontRef>
+        </p:style>
+        <p:txBody>
+          <a:bodyPr rtlCol="0" anchor="ctr"/>
+          <a:lstStyle/>
+          <a:p>
+            <a:pPr algn="ctr"/>
+            <a:endParaRPr lang="sv-SE"/>
+          </a:p>
+        </p:txBody>
+      </p:sp>
+      <p:sp>
+        <p:nvSpPr>
+          <p:cNvPr id="8" name="Rectangle 7">
+            <a:extLst>
+              <a:ext uri="{FF2B5EF4-FFF2-40B4-BE49-F238E27FC236}">
+                <a16:creationId xmlns:a16="http://schemas.microsoft.com/office/drawing/2014/main" id="{31722066-EA7F-BFEB-D509-E331C36EFC81}"/>
+              </a:ext>
+            </a:extLst>
+          </p:cNvPr>
+          <p:cNvSpPr/>
+          <p:nvPr/>
+        </p:nvSpPr>
+        <p:spPr>
+          <a:xfrm>
+            <a:off x="4559173" y="6014599"/>
+            <a:ext cx="1026159" cy="924565"/>
+          </a:xfrm>
+          <a:prstGeom prst="rect">
+            <a:avLst/>
+          </a:prstGeom>
+          <a:noFill/>
+        </p:spPr>
+        <p:style>
+          <a:lnRef idx="2">
+            <a:schemeClr val="accent1">
+              <a:shade val="15000"/>
+            </a:schemeClr>
+          </a:lnRef>
+          <a:fillRef idx="1">
+            <a:schemeClr val="accent1"/>
+          </a:fillRef>
+          <a:effectRef idx="0">
+            <a:schemeClr val="accent1"/>
+          </a:effectRef>
+          <a:fontRef idx="minor">
+            <a:schemeClr val="lt1"/>
+          </a:fontRef>
+        </p:style>
+        <p:txBody>
+          <a:bodyPr rtlCol="0" anchor="ctr"/>
+          <a:lstStyle/>
+          <a:p>
+            <a:pPr algn="ctr"/>
+            <a:endParaRPr lang="sv-SE"/>
+          </a:p>
+        </p:txBody>
+      </p:sp>
+      <p:sp>
+        <p:nvSpPr>
+          <p:cNvPr id="9" name="Diamond 8">
+            <a:extLst>
+              <a:ext uri="{FF2B5EF4-FFF2-40B4-BE49-F238E27FC236}">
+                <a16:creationId xmlns:a16="http://schemas.microsoft.com/office/drawing/2014/main" id="{03FEC330-D253-8914-8AAC-FB728E5DF4D5}"/>
+              </a:ext>
+            </a:extLst>
+          </p:cNvPr>
+          <p:cNvSpPr/>
+          <p:nvPr/>
+        </p:nvSpPr>
+        <p:spPr>
+          <a:xfrm>
+            <a:off x="3276600" y="3290070"/>
+            <a:ext cx="1026160" cy="904240"/>
+          </a:xfrm>
+          <a:prstGeom prst="diamond">
+            <a:avLst/>
+          </a:prstGeom>
+          <a:noFill/>
+        </p:spPr>
+        <p:style>
+          <a:lnRef idx="2">
+            <a:schemeClr val="accent1">
+              <a:shade val="15000"/>
+            </a:schemeClr>
+          </a:lnRef>
+          <a:fillRef idx="1">
+            <a:schemeClr val="accent1"/>
+          </a:fillRef>
+          <a:effectRef idx="0">
+            <a:schemeClr val="accent1"/>
+          </a:effectRef>
+          <a:fontRef idx="minor">
+            <a:schemeClr val="lt1"/>
+          </a:fontRef>
+        </p:style>
+        <p:txBody>
+          <a:bodyPr rtlCol="0" anchor="ctr"/>
+          <a:lstStyle/>
+          <a:p>
+            <a:pPr algn="ctr"/>
+            <a:endParaRPr lang="sv-SE"/>
+          </a:p>
+        </p:txBody>
+      </p:sp>
+      <p:sp>
+        <p:nvSpPr>
+          <p:cNvPr id="10" name="Diamond 9">
+            <a:extLst>
+              <a:ext uri="{FF2B5EF4-FFF2-40B4-BE49-F238E27FC236}">
+                <a16:creationId xmlns:a16="http://schemas.microsoft.com/office/drawing/2014/main" id="{BD4969B7-1F15-F2AB-FDA5-5EF776B3E013}"/>
+              </a:ext>
+            </a:extLst>
+          </p:cNvPr>
+          <p:cNvSpPr/>
+          <p:nvPr/>
+        </p:nvSpPr>
+        <p:spPr>
+          <a:xfrm>
+            <a:off x="3230880" y="822671"/>
+            <a:ext cx="1026160" cy="904240"/>
+          </a:xfrm>
+          <a:prstGeom prst="diamond">
+            <a:avLst/>
+          </a:prstGeom>
+          <a:noFill/>
+        </p:spPr>
+        <p:style>
+          <a:lnRef idx="2">
+            <a:schemeClr val="accent1">
+              <a:shade val="15000"/>
+            </a:schemeClr>
+          </a:lnRef>
+          <a:fillRef idx="1">
+            <a:schemeClr val="accent1"/>
+          </a:fillRef>
+          <a:effectRef idx="0">
+            <a:schemeClr val="accent1"/>
+          </a:effectRef>
+          <a:fontRef idx="minor">
+            <a:schemeClr val="lt1"/>
+          </a:fontRef>
+        </p:style>
+        <p:txBody>
+          <a:bodyPr rtlCol="0" anchor="ctr"/>
+          <a:lstStyle/>
+          <a:p>
+            <a:pPr algn="ctr"/>
+            <a:endParaRPr lang="sv-SE"/>
+          </a:p>
+        </p:txBody>
+      </p:sp>
+      <p:sp>
+        <p:nvSpPr>
+          <p:cNvPr id="11" name="Oval 10">
+            <a:extLst>
+              <a:ext uri="{FF2B5EF4-FFF2-40B4-BE49-F238E27FC236}">
+                <a16:creationId xmlns:a16="http://schemas.microsoft.com/office/drawing/2014/main" id="{69FF348C-2207-5298-0340-EE70C0455D75}"/>
+              </a:ext>
+            </a:extLst>
+          </p:cNvPr>
+          <p:cNvSpPr/>
+          <p:nvPr/>
+        </p:nvSpPr>
+        <p:spPr>
+          <a:xfrm>
+            <a:off x="6488318" y="3318676"/>
+            <a:ext cx="934720" cy="833120"/>
+          </a:xfrm>
+          <a:prstGeom prst="ellipse">
+            <a:avLst/>
+          </a:prstGeom>
+          <a:noFill/>
+          <a:ln>
+            <a:solidFill>
+              <a:schemeClr val="tx1">
+                <a:lumMod val="95000"/>
+                <a:lumOff val="5000"/>
+              </a:schemeClr>
+            </a:solidFill>
+          </a:ln>
+        </p:spPr>
+        <p:style>
+          <a:lnRef idx="2">
+            <a:schemeClr val="accent1">
+              <a:shade val="15000"/>
+            </a:schemeClr>
+          </a:lnRef>
+          <a:fillRef idx="1">
+            <a:schemeClr val="accent1"/>
+          </a:fillRef>
+          <a:effectRef idx="0">
+            <a:schemeClr val="accent1"/>
+          </a:effectRef>
+          <a:fontRef idx="minor">
+            <a:schemeClr val="lt1"/>
+          </a:fontRef>
+        </p:style>
+        <p:txBody>
+          <a:bodyPr rtlCol="0" anchor="ctr"/>
+          <a:lstStyle/>
+          <a:p>
+            <a:pPr algn="ctr"/>
+            <a:endParaRPr lang="sv-SE"/>
+          </a:p>
+        </p:txBody>
+      </p:sp>
+      <p:sp>
+        <p:nvSpPr>
+          <p:cNvPr id="12" name="Oval 11">
+            <a:extLst>
+              <a:ext uri="{FF2B5EF4-FFF2-40B4-BE49-F238E27FC236}">
+                <a16:creationId xmlns:a16="http://schemas.microsoft.com/office/drawing/2014/main" id="{88FDC6E0-0FAA-A429-AE1D-64FAD0AABF13}"/>
+              </a:ext>
+            </a:extLst>
+          </p:cNvPr>
+          <p:cNvSpPr/>
+          <p:nvPr/>
+        </p:nvSpPr>
+        <p:spPr>
+          <a:xfrm>
+            <a:off x="3345179" y="6040377"/>
+            <a:ext cx="934720" cy="833120"/>
+          </a:xfrm>
+          <a:prstGeom prst="ellipse">
+            <a:avLst/>
+          </a:prstGeom>
+          <a:noFill/>
+          <a:ln>
+            <a:solidFill>
+              <a:schemeClr val="tx1">
+                <a:lumMod val="95000"/>
+                <a:lumOff val="5000"/>
+              </a:schemeClr>
+            </a:solidFill>
+          </a:ln>
+        </p:spPr>
+        <p:style>
+          <a:lnRef idx="2">
+            <a:schemeClr val="accent1">
+              <a:shade val="15000"/>
+            </a:schemeClr>
+          </a:lnRef>
+          <a:fillRef idx="1">
+            <a:schemeClr val="accent1"/>
+          </a:fillRef>
+          <a:effectRef idx="0">
+            <a:schemeClr val="accent1"/>
+          </a:effectRef>
+          <a:fontRef idx="minor">
+            <a:schemeClr val="lt1"/>
+          </a:fontRef>
+        </p:style>
+        <p:txBody>
+          <a:bodyPr rtlCol="0" anchor="ctr"/>
+          <a:lstStyle/>
+          <a:p>
+            <a:pPr algn="ctr"/>
+            <a:endParaRPr lang="sv-SE"/>
+          </a:p>
+        </p:txBody>
+      </p:sp>
+      <p:sp>
+        <p:nvSpPr>
+          <p:cNvPr id="13" name="Oval 12">
+            <a:extLst>
+              <a:ext uri="{FF2B5EF4-FFF2-40B4-BE49-F238E27FC236}">
+                <a16:creationId xmlns:a16="http://schemas.microsoft.com/office/drawing/2014/main" id="{7C4617BC-EDFC-5523-7DAC-1815EF5B7D07}"/>
+              </a:ext>
+            </a:extLst>
+          </p:cNvPr>
+          <p:cNvSpPr/>
+          <p:nvPr/>
+        </p:nvSpPr>
+        <p:spPr>
+          <a:xfrm>
+            <a:off x="3276600" y="-1016000"/>
+            <a:ext cx="934720" cy="833120"/>
+          </a:xfrm>
+          <a:prstGeom prst="ellipse">
+            <a:avLst/>
+          </a:prstGeom>
+          <a:noFill/>
+          <a:ln>
+            <a:solidFill>
+              <a:schemeClr val="tx1">
+                <a:lumMod val="95000"/>
+                <a:lumOff val="5000"/>
+              </a:schemeClr>
+            </a:solidFill>
+          </a:ln>
+        </p:spPr>
+        <p:style>
+          <a:lnRef idx="2">
+            <a:schemeClr val="accent1">
+              <a:shade val="15000"/>
+            </a:schemeClr>
+          </a:lnRef>
+          <a:fillRef idx="1">
+            <a:schemeClr val="accent1"/>
+          </a:fillRef>
+          <a:effectRef idx="0">
+            <a:schemeClr val="accent1"/>
+          </a:effectRef>
+          <a:fontRef idx="minor">
+            <a:schemeClr val="lt1"/>
+          </a:fontRef>
+        </p:style>
+        <p:txBody>
+          <a:bodyPr rtlCol="0" anchor="ctr"/>
+          <a:lstStyle/>
+          <a:p>
+            <a:pPr algn="ctr"/>
+            <a:endParaRPr lang="sv-SE"/>
+          </a:p>
+        </p:txBody>
+      </p:sp>
+      <p:sp>
+        <p:nvSpPr>
+          <p:cNvPr id="17" name="TextBox 16">
+            <a:extLst>
+              <a:ext uri="{FF2B5EF4-FFF2-40B4-BE49-F238E27FC236}">
+                <a16:creationId xmlns:a16="http://schemas.microsoft.com/office/drawing/2014/main" id="{2324082D-F433-4F29-05DC-2FD893B81523}"/>
+              </a:ext>
+            </a:extLst>
+          </p:cNvPr>
+          <p:cNvSpPr txBox="1"/>
+          <p:nvPr/>
+        </p:nvSpPr>
+        <p:spPr>
+          <a:xfrm rot="16200000">
+            <a:off x="-1436951" y="284042"/>
+            <a:ext cx="919804" cy="369332"/>
+          </a:xfrm>
+          <a:prstGeom prst="rect">
+            <a:avLst/>
+          </a:prstGeom>
+          <a:noFill/>
+        </p:spPr>
+        <p:txBody>
+          <a:bodyPr wrap="none" rtlCol="0">
+            <a:spAutoFit/>
+          </a:bodyPr>
+          <a:lstStyle/>
+          <a:p>
+            <a:r>
+              <a:rPr lang="sv-SE" dirty="0" err="1"/>
+              <a:t>Cycle</a:t>
+            </a:r>
+            <a:r>
+              <a:rPr lang="sv-SE" dirty="0"/>
+              <a:t> 1</a:t>
+            </a:r>
+          </a:p>
+        </p:txBody>
+      </p:sp>
+      <p:sp>
+        <p:nvSpPr>
+          <p:cNvPr id="18" name="TextBox 17">
+            <a:extLst>
+              <a:ext uri="{FF2B5EF4-FFF2-40B4-BE49-F238E27FC236}">
+                <a16:creationId xmlns:a16="http://schemas.microsoft.com/office/drawing/2014/main" id="{7D19C490-2DA9-4C49-AD8B-C7E5488B7FFA}"/>
+              </a:ext>
+            </a:extLst>
+          </p:cNvPr>
+          <p:cNvSpPr txBox="1"/>
+          <p:nvPr/>
+        </p:nvSpPr>
+        <p:spPr>
+          <a:xfrm rot="16200000">
+            <a:off x="-1436952" y="3359450"/>
+            <a:ext cx="919804" cy="369332"/>
+          </a:xfrm>
+          <a:prstGeom prst="rect">
+            <a:avLst/>
+          </a:prstGeom>
+          <a:noFill/>
+        </p:spPr>
+        <p:txBody>
+          <a:bodyPr wrap="none" rtlCol="0">
+            <a:spAutoFit/>
+          </a:bodyPr>
+          <a:lstStyle/>
+          <a:p>
+            <a:r>
+              <a:rPr lang="sv-SE" dirty="0" err="1"/>
+              <a:t>Cycle</a:t>
+            </a:r>
+            <a:r>
+              <a:rPr lang="sv-SE" dirty="0"/>
+              <a:t> 2</a:t>
+            </a:r>
+          </a:p>
+        </p:txBody>
+      </p:sp>
+      <p:sp>
+        <p:nvSpPr>
+          <p:cNvPr id="19" name="TextBox 18">
+            <a:extLst>
+              <a:ext uri="{FF2B5EF4-FFF2-40B4-BE49-F238E27FC236}">
+                <a16:creationId xmlns:a16="http://schemas.microsoft.com/office/drawing/2014/main" id="{23C1D402-8C1E-98EA-8F23-416445E19BFD}"/>
+              </a:ext>
+            </a:extLst>
+          </p:cNvPr>
+          <p:cNvSpPr txBox="1"/>
+          <p:nvPr/>
+        </p:nvSpPr>
+        <p:spPr>
+          <a:xfrm rot="16200000">
+            <a:off x="-1469984" y="6039071"/>
+            <a:ext cx="919804" cy="369332"/>
+          </a:xfrm>
+          <a:prstGeom prst="rect">
+            <a:avLst/>
+          </a:prstGeom>
+          <a:noFill/>
+        </p:spPr>
+        <p:txBody>
+          <a:bodyPr wrap="none" rtlCol="0">
+            <a:spAutoFit/>
+          </a:bodyPr>
+          <a:lstStyle/>
+          <a:p>
+            <a:r>
+              <a:rPr lang="sv-SE" dirty="0" err="1"/>
+              <a:t>Cycle</a:t>
+            </a:r>
+            <a:r>
+              <a:rPr lang="sv-SE" dirty="0"/>
+              <a:t> 3</a:t>
+            </a:r>
+          </a:p>
+        </p:txBody>
+      </p:sp>
+      <p:cxnSp>
+        <p:nvCxnSpPr>
+          <p:cNvPr id="21" name="Straight Arrow Connector 20">
+            <a:extLst>
+              <a:ext uri="{FF2B5EF4-FFF2-40B4-BE49-F238E27FC236}">
+                <a16:creationId xmlns:a16="http://schemas.microsoft.com/office/drawing/2014/main" id="{C386693C-22EA-2705-DED8-00D000813E72}"/>
+              </a:ext>
+            </a:extLst>
+          </p:cNvPr>
+          <p:cNvCxnSpPr>
+            <a:cxnSpLocks/>
+            <a:stCxn id="13" idx="4"/>
+            <a:endCxn id="10" idx="0"/>
+          </p:cNvCxnSpPr>
+          <p:nvPr/>
+        </p:nvCxnSpPr>
+        <p:spPr>
+          <a:xfrm>
+            <a:off x="3743960" y="-182880"/>
+            <a:ext cx="0" cy="1005551"/>
+          </a:xfrm>
+          <a:prstGeom prst="straightConnector1">
+            <a:avLst/>
+          </a:prstGeom>
+          <a:ln>
+            <a:solidFill>
+              <a:schemeClr val="tx1">
+                <a:lumMod val="95000"/>
+                <a:lumOff val="5000"/>
+              </a:schemeClr>
+            </a:solidFill>
+            <a:tailEnd type="triangle"/>
+          </a:ln>
+        </p:spPr>
+        <p:style>
+          <a:lnRef idx="2">
+            <a:schemeClr val="accent1"/>
+          </a:lnRef>
+          <a:fillRef idx="0">
+            <a:schemeClr val="accent1"/>
+          </a:fillRef>
+          <a:effectRef idx="1">
+            <a:schemeClr val="accent1"/>
+          </a:effectRef>
+          <a:fontRef idx="minor">
+            <a:schemeClr val="tx1"/>
+          </a:fontRef>
+        </p:style>
+      </p:cxnSp>
+      <p:cxnSp>
+        <p:nvCxnSpPr>
+          <p:cNvPr id="22" name="Straight Arrow Connector 21">
+            <a:extLst>
+              <a:ext uri="{FF2B5EF4-FFF2-40B4-BE49-F238E27FC236}">
+                <a16:creationId xmlns:a16="http://schemas.microsoft.com/office/drawing/2014/main" id="{38F61FFE-9AA9-609D-113D-1CBD93EEE9A1}"/>
+              </a:ext>
+            </a:extLst>
+          </p:cNvPr>
+          <p:cNvCxnSpPr>
+            <a:cxnSpLocks/>
+            <a:stCxn id="10" idx="3"/>
+            <a:endCxn id="6" idx="1"/>
+          </p:cNvCxnSpPr>
+          <p:nvPr/>
+        </p:nvCxnSpPr>
+        <p:spPr>
+          <a:xfrm flipV="1">
+            <a:off x="4257040" y="1267010"/>
+            <a:ext cx="302134" cy="7781"/>
+          </a:xfrm>
+          <a:prstGeom prst="straightConnector1">
+            <a:avLst/>
+          </a:prstGeom>
+          <a:ln>
+            <a:solidFill>
+              <a:schemeClr val="tx1">
+                <a:lumMod val="95000"/>
+                <a:lumOff val="5000"/>
+              </a:schemeClr>
+            </a:solidFill>
+            <a:tailEnd type="triangle"/>
+          </a:ln>
+        </p:spPr>
+        <p:style>
+          <a:lnRef idx="2">
+            <a:schemeClr val="accent1"/>
+          </a:lnRef>
+          <a:fillRef idx="0">
+            <a:schemeClr val="accent1"/>
+          </a:fillRef>
+          <a:effectRef idx="1">
+            <a:schemeClr val="accent1"/>
+          </a:effectRef>
+          <a:fontRef idx="minor">
+            <a:schemeClr val="tx1"/>
+          </a:fontRef>
+        </p:style>
+      </p:cxnSp>
+      <p:cxnSp>
+        <p:nvCxnSpPr>
+          <p:cNvPr id="29" name="Straight Arrow Connector 28">
+            <a:extLst>
+              <a:ext uri="{FF2B5EF4-FFF2-40B4-BE49-F238E27FC236}">
+                <a16:creationId xmlns:a16="http://schemas.microsoft.com/office/drawing/2014/main" id="{8FD94913-FE23-2F5A-66C7-A8DACEE53240}"/>
+              </a:ext>
+            </a:extLst>
+          </p:cNvPr>
+          <p:cNvCxnSpPr>
+            <a:cxnSpLocks/>
+            <a:stCxn id="7" idx="1"/>
+            <a:endCxn id="9" idx="3"/>
+          </p:cNvCxnSpPr>
+          <p:nvPr/>
+        </p:nvCxnSpPr>
+        <p:spPr>
+          <a:xfrm flipH="1">
+            <a:off x="4302760" y="3732079"/>
+            <a:ext cx="256413" cy="10111"/>
+          </a:xfrm>
+          <a:prstGeom prst="straightConnector1">
+            <a:avLst/>
+          </a:prstGeom>
+          <a:ln>
+            <a:solidFill>
+              <a:schemeClr val="tx1">
+                <a:lumMod val="95000"/>
+                <a:lumOff val="5000"/>
+              </a:schemeClr>
+            </a:solidFill>
+            <a:tailEnd type="triangle"/>
+          </a:ln>
+        </p:spPr>
+        <p:style>
+          <a:lnRef idx="2">
+            <a:schemeClr val="accent1"/>
+          </a:lnRef>
+          <a:fillRef idx="0">
+            <a:schemeClr val="accent1"/>
+          </a:fillRef>
+          <a:effectRef idx="1">
+            <a:schemeClr val="accent1"/>
+          </a:effectRef>
+          <a:fontRef idx="minor">
+            <a:schemeClr val="tx1"/>
+          </a:fontRef>
+        </p:style>
+      </p:cxnSp>
+      <p:cxnSp>
+        <p:nvCxnSpPr>
+          <p:cNvPr id="33" name="Straight Arrow Connector 32">
+            <a:extLst>
+              <a:ext uri="{FF2B5EF4-FFF2-40B4-BE49-F238E27FC236}">
+                <a16:creationId xmlns:a16="http://schemas.microsoft.com/office/drawing/2014/main" id="{745DFE4E-2E78-5C85-93D2-9C36E846377D}"/>
+              </a:ext>
+            </a:extLst>
+          </p:cNvPr>
+          <p:cNvCxnSpPr>
+            <a:cxnSpLocks/>
+            <a:stCxn id="9" idx="2"/>
+            <a:endCxn id="12" idx="0"/>
+          </p:cNvCxnSpPr>
+          <p:nvPr/>
+        </p:nvCxnSpPr>
+        <p:spPr>
+          <a:xfrm>
+            <a:off x="3789680" y="4194310"/>
+            <a:ext cx="22859" cy="1846067"/>
+          </a:xfrm>
+          <a:prstGeom prst="straightConnector1">
+            <a:avLst/>
+          </a:prstGeom>
+          <a:ln>
+            <a:solidFill>
+              <a:schemeClr val="tx1">
+                <a:lumMod val="95000"/>
+                <a:lumOff val="5000"/>
+              </a:schemeClr>
+            </a:solidFill>
+            <a:tailEnd type="triangle"/>
+          </a:ln>
+        </p:spPr>
+        <p:style>
+          <a:lnRef idx="2">
+            <a:schemeClr val="accent1"/>
+          </a:lnRef>
+          <a:fillRef idx="0">
+            <a:schemeClr val="accent1"/>
+          </a:fillRef>
+          <a:effectRef idx="1">
+            <a:schemeClr val="accent1"/>
+          </a:effectRef>
+          <a:fontRef idx="minor">
+            <a:schemeClr val="tx1"/>
+          </a:fontRef>
+        </p:style>
+      </p:cxnSp>
+      <p:cxnSp>
+        <p:nvCxnSpPr>
+          <p:cNvPr id="36" name="Straight Arrow Connector 35">
+            <a:extLst>
+              <a:ext uri="{FF2B5EF4-FFF2-40B4-BE49-F238E27FC236}">
+                <a16:creationId xmlns:a16="http://schemas.microsoft.com/office/drawing/2014/main" id="{4847152E-C70C-DFB8-070B-DDD6752D83B2}"/>
+              </a:ext>
+            </a:extLst>
+          </p:cNvPr>
+          <p:cNvCxnSpPr>
+            <a:cxnSpLocks/>
+            <a:stCxn id="12" idx="6"/>
+            <a:endCxn id="8" idx="1"/>
+          </p:cNvCxnSpPr>
+          <p:nvPr/>
+        </p:nvCxnSpPr>
+        <p:spPr>
+          <a:xfrm>
+            <a:off x="4279899" y="6456937"/>
+            <a:ext cx="279274" cy="19945"/>
+          </a:xfrm>
+          <a:prstGeom prst="straightConnector1">
+            <a:avLst/>
+          </a:prstGeom>
+          <a:ln>
+            <a:solidFill>
+              <a:schemeClr val="tx1">
+                <a:lumMod val="95000"/>
+                <a:lumOff val="5000"/>
+              </a:schemeClr>
+            </a:solidFill>
+            <a:tailEnd type="triangle"/>
+          </a:ln>
+        </p:spPr>
+        <p:style>
+          <a:lnRef idx="2">
+            <a:schemeClr val="accent1"/>
+          </a:lnRef>
+          <a:fillRef idx="0">
+            <a:schemeClr val="accent1"/>
+          </a:fillRef>
+          <a:effectRef idx="1">
+            <a:schemeClr val="accent1"/>
+          </a:effectRef>
+          <a:fontRef idx="minor">
+            <a:schemeClr val="tx1"/>
+          </a:fontRef>
+        </p:style>
+      </p:cxnSp>
+      <p:cxnSp>
+        <p:nvCxnSpPr>
+          <p:cNvPr id="43" name="Straight Arrow Connector 42">
+            <a:extLst>
+              <a:ext uri="{FF2B5EF4-FFF2-40B4-BE49-F238E27FC236}">
+                <a16:creationId xmlns:a16="http://schemas.microsoft.com/office/drawing/2014/main" id="{C5BEAA65-27AD-4124-82C3-770467E05FF2}"/>
+              </a:ext>
+            </a:extLst>
+          </p:cNvPr>
+          <p:cNvCxnSpPr>
+            <a:cxnSpLocks/>
+            <a:stCxn id="11" idx="2"/>
+            <a:endCxn id="7" idx="3"/>
+          </p:cNvCxnSpPr>
+          <p:nvPr/>
+        </p:nvCxnSpPr>
+        <p:spPr>
+          <a:xfrm flipH="1" flipV="1">
+            <a:off x="5585332" y="3732079"/>
+            <a:ext cx="902986" cy="3157"/>
+          </a:xfrm>
+          <a:prstGeom prst="straightConnector1">
+            <a:avLst/>
+          </a:prstGeom>
+          <a:ln>
+            <a:solidFill>
+              <a:schemeClr val="tx1">
+                <a:lumMod val="95000"/>
+                <a:lumOff val="5000"/>
+              </a:schemeClr>
+            </a:solidFill>
+            <a:tailEnd type="triangle"/>
+          </a:ln>
+        </p:spPr>
+        <p:style>
+          <a:lnRef idx="2">
+            <a:schemeClr val="accent1"/>
+          </a:lnRef>
+          <a:fillRef idx="0">
+            <a:schemeClr val="accent1"/>
+          </a:fillRef>
+          <a:effectRef idx="1">
+            <a:schemeClr val="accent1"/>
+          </a:effectRef>
+          <a:fontRef idx="minor">
+            <a:schemeClr val="tx1"/>
+          </a:fontRef>
+        </p:style>
+      </p:cxnSp>
+      <p:sp>
+        <p:nvSpPr>
+          <p:cNvPr id="50" name="Oval 49">
+            <a:extLst>
+              <a:ext uri="{FF2B5EF4-FFF2-40B4-BE49-F238E27FC236}">
+                <a16:creationId xmlns:a16="http://schemas.microsoft.com/office/drawing/2014/main" id="{1D91B41F-CD35-1BBE-86F4-D05A092FE63F}"/>
+              </a:ext>
+            </a:extLst>
+          </p:cNvPr>
+          <p:cNvSpPr/>
+          <p:nvPr/>
+        </p:nvSpPr>
+        <p:spPr>
+          <a:xfrm>
+            <a:off x="7423038" y="6569917"/>
+            <a:ext cx="467360" cy="398971"/>
+          </a:xfrm>
+          <a:prstGeom prst="ellipse">
+            <a:avLst/>
+          </a:prstGeom>
+          <a:noFill/>
+          <a:ln>
+            <a:solidFill>
+              <a:schemeClr val="tx1">
+                <a:lumMod val="95000"/>
+                <a:lumOff val="5000"/>
+              </a:schemeClr>
+            </a:solidFill>
+          </a:ln>
+        </p:spPr>
+        <p:style>
+          <a:lnRef idx="2">
+            <a:schemeClr val="accent1">
+              <a:shade val="15000"/>
+            </a:schemeClr>
+          </a:lnRef>
+          <a:fillRef idx="1">
+            <a:schemeClr val="accent1"/>
+          </a:fillRef>
+          <a:effectRef idx="0">
+            <a:schemeClr val="accent1"/>
+          </a:effectRef>
+          <a:fontRef idx="minor">
+            <a:schemeClr val="lt1"/>
+          </a:fontRef>
+        </p:style>
+        <p:txBody>
+          <a:bodyPr rtlCol="0" anchor="ctr"/>
+          <a:lstStyle/>
+          <a:p>
+            <a:pPr algn="ctr"/>
+            <a:endParaRPr lang="sv-SE"/>
+          </a:p>
+        </p:txBody>
+      </p:sp>
+      <p:sp>
+        <p:nvSpPr>
+          <p:cNvPr id="51" name="Diamond 50">
+            <a:extLst>
+              <a:ext uri="{FF2B5EF4-FFF2-40B4-BE49-F238E27FC236}">
+                <a16:creationId xmlns:a16="http://schemas.microsoft.com/office/drawing/2014/main" id="{359A7306-5070-93B2-3318-D91BA1250FBC}"/>
+              </a:ext>
+            </a:extLst>
+          </p:cNvPr>
+          <p:cNvSpPr/>
+          <p:nvPr/>
+        </p:nvSpPr>
+        <p:spPr>
+          <a:xfrm>
+            <a:off x="7423038" y="7397583"/>
+            <a:ext cx="513080" cy="452120"/>
+          </a:xfrm>
+          <a:prstGeom prst="diamond">
+            <a:avLst/>
+          </a:prstGeom>
+          <a:noFill/>
+        </p:spPr>
+        <p:style>
+          <a:lnRef idx="2">
+            <a:schemeClr val="accent1">
+              <a:shade val="15000"/>
+            </a:schemeClr>
+          </a:lnRef>
+          <a:fillRef idx="1">
+            <a:schemeClr val="accent1"/>
+          </a:fillRef>
+          <a:effectRef idx="0">
+            <a:schemeClr val="accent1"/>
+          </a:effectRef>
+          <a:fontRef idx="minor">
+            <a:schemeClr val="lt1"/>
+          </a:fontRef>
+        </p:style>
+        <p:txBody>
+          <a:bodyPr rtlCol="0" anchor="ctr"/>
+          <a:lstStyle/>
+          <a:p>
+            <a:pPr algn="ctr"/>
+            <a:endParaRPr lang="sv-SE"/>
+          </a:p>
+        </p:txBody>
+      </p:sp>
+      <p:sp>
+        <p:nvSpPr>
+          <p:cNvPr id="52" name="TextBox 51">
+            <a:extLst>
+              <a:ext uri="{FF2B5EF4-FFF2-40B4-BE49-F238E27FC236}">
+                <a16:creationId xmlns:a16="http://schemas.microsoft.com/office/drawing/2014/main" id="{E40496E8-CAA3-6B91-0FBD-90E132F68D47}"/>
+              </a:ext>
+            </a:extLst>
+          </p:cNvPr>
+          <p:cNvSpPr txBox="1"/>
+          <p:nvPr/>
+        </p:nvSpPr>
+        <p:spPr>
+          <a:xfrm>
+            <a:off x="-311374" y="-131653"/>
+            <a:ext cx="3116677" cy="1815882"/>
+          </a:xfrm>
+          <a:prstGeom prst="rect">
+            <a:avLst/>
+          </a:prstGeom>
+          <a:noFill/>
+        </p:spPr>
+        <p:txBody>
+          <a:bodyPr wrap="square" rtlCol="0">
+            <a:spAutoFit/>
+          </a:bodyPr>
+          <a:lstStyle/>
+          <a:p>
+            <a:pPr marL="285750" indent="-285750">
+              <a:buFont typeface="Arial" panose="020B0604020202020204" pitchFamily="34" charset="0"/>
+              <a:buChar char="•"/>
+            </a:pPr>
+            <a:r>
+              <a:rPr lang="sv-SE" sz="1600" dirty="0"/>
+              <a:t>MEW:  6 events</a:t>
+            </a:r>
+          </a:p>
+          <a:p>
+            <a:endParaRPr lang="sv-SE" sz="1600" dirty="0"/>
+          </a:p>
+          <a:p>
+            <a:pPr marL="285750" indent="-285750">
+              <a:buFont typeface="Arial" panose="020B0604020202020204" pitchFamily="34" charset="0"/>
+              <a:buChar char="•"/>
+            </a:pPr>
+            <a:r>
+              <a:rPr lang="sv-SE" sz="1600" dirty="0" err="1"/>
+              <a:t>Operational</a:t>
+            </a:r>
+            <a:r>
+              <a:rPr lang="sv-SE" sz="1600" dirty="0"/>
+              <a:t>: long list </a:t>
+            </a:r>
+            <a:r>
+              <a:rPr lang="sv-SE" sz="1600" dirty="0" err="1"/>
+              <a:t>of</a:t>
+            </a:r>
+            <a:r>
+              <a:rPr lang="sv-SE" sz="1600" dirty="0"/>
+              <a:t> </a:t>
+            </a:r>
+            <a:r>
+              <a:rPr lang="sv-SE" sz="1600" dirty="0" err="1"/>
+              <a:t>detailed</a:t>
+            </a:r>
+            <a:r>
+              <a:rPr lang="sv-SE" sz="1600" dirty="0"/>
+              <a:t> </a:t>
+            </a:r>
+            <a:r>
+              <a:rPr lang="sv-SE" sz="1600" dirty="0" err="1"/>
+              <a:t>variabled</a:t>
+            </a:r>
+            <a:endParaRPr lang="sv-SE" sz="1600" dirty="0"/>
+          </a:p>
+          <a:p>
+            <a:endParaRPr lang="sv-SE" sz="1600" dirty="0"/>
+          </a:p>
+          <a:p>
+            <a:pPr marL="285750" indent="-285750">
+              <a:buFont typeface="Arial" panose="020B0604020202020204" pitchFamily="34" charset="0"/>
+              <a:buChar char="•"/>
+            </a:pPr>
+            <a:r>
+              <a:rPr lang="sv-SE" sz="1600" dirty="0"/>
+              <a:t>Socio </a:t>
+            </a:r>
+            <a:r>
+              <a:rPr lang="sv-SE" sz="1600" dirty="0" err="1"/>
+              <a:t>economic</a:t>
+            </a:r>
+            <a:r>
+              <a:rPr lang="sv-SE" sz="1600" dirty="0"/>
+              <a:t>: 2 </a:t>
+            </a:r>
+            <a:r>
+              <a:rPr lang="sv-SE" sz="1600" dirty="0" err="1"/>
+              <a:t>borad</a:t>
+            </a:r>
+            <a:r>
+              <a:rPr lang="sv-SE" sz="1600" dirty="0"/>
+              <a:t> </a:t>
+            </a:r>
+            <a:r>
+              <a:rPr lang="sv-SE" sz="1600" dirty="0" err="1"/>
+              <a:t>categories</a:t>
+            </a:r>
+            <a:r>
+              <a:rPr lang="sv-SE" sz="1600" dirty="0"/>
+              <a:t>  </a:t>
+            </a:r>
+          </a:p>
+        </p:txBody>
+      </p:sp>
+      <p:sp>
+        <p:nvSpPr>
+          <p:cNvPr id="53" name="Diamond 52">
+            <a:extLst>
+              <a:ext uri="{FF2B5EF4-FFF2-40B4-BE49-F238E27FC236}">
+                <a16:creationId xmlns:a16="http://schemas.microsoft.com/office/drawing/2014/main" id="{96C50227-5A15-A621-0829-0C2305F324A8}"/>
+              </a:ext>
+            </a:extLst>
+          </p:cNvPr>
+          <p:cNvSpPr/>
+          <p:nvPr/>
+        </p:nvSpPr>
+        <p:spPr>
+          <a:xfrm>
+            <a:off x="6488318" y="788655"/>
+            <a:ext cx="1026160" cy="904240"/>
+          </a:xfrm>
+          <a:prstGeom prst="diamond">
+            <a:avLst/>
+          </a:prstGeom>
+          <a:noFill/>
+        </p:spPr>
+        <p:style>
+          <a:lnRef idx="2">
+            <a:schemeClr val="accent1">
+              <a:shade val="15000"/>
+            </a:schemeClr>
+          </a:lnRef>
+          <a:fillRef idx="1">
+            <a:schemeClr val="accent1"/>
+          </a:fillRef>
+          <a:effectRef idx="0">
+            <a:schemeClr val="accent1"/>
+          </a:effectRef>
+          <a:fontRef idx="minor">
+            <a:schemeClr val="lt1"/>
+          </a:fontRef>
+        </p:style>
+        <p:txBody>
+          <a:bodyPr rtlCol="0" anchor="ctr"/>
+          <a:lstStyle/>
+          <a:p>
+            <a:pPr algn="ctr"/>
+            <a:endParaRPr lang="sv-SE"/>
+          </a:p>
+        </p:txBody>
+      </p:sp>
+      <p:cxnSp>
+        <p:nvCxnSpPr>
+          <p:cNvPr id="54" name="Straight Arrow Connector 53">
+            <a:extLst>
+              <a:ext uri="{FF2B5EF4-FFF2-40B4-BE49-F238E27FC236}">
+                <a16:creationId xmlns:a16="http://schemas.microsoft.com/office/drawing/2014/main" id="{7F0F5577-A5E1-7DCE-D90D-0EE691F388D2}"/>
+              </a:ext>
+            </a:extLst>
+          </p:cNvPr>
+          <p:cNvCxnSpPr>
+            <a:cxnSpLocks/>
+            <a:stCxn id="6" idx="3"/>
+            <a:endCxn id="53" idx="1"/>
+          </p:cNvCxnSpPr>
+          <p:nvPr/>
+        </p:nvCxnSpPr>
+        <p:spPr>
+          <a:xfrm flipV="1">
+            <a:off x="5585332" y="1240775"/>
+            <a:ext cx="902986" cy="26235"/>
+          </a:xfrm>
+          <a:prstGeom prst="straightConnector1">
+            <a:avLst/>
+          </a:prstGeom>
+          <a:ln>
+            <a:solidFill>
+              <a:schemeClr val="tx1">
+                <a:lumMod val="95000"/>
+                <a:lumOff val="5000"/>
+              </a:schemeClr>
+            </a:solidFill>
+            <a:tailEnd type="triangle"/>
+          </a:ln>
+        </p:spPr>
+        <p:style>
+          <a:lnRef idx="2">
+            <a:schemeClr val="accent1"/>
+          </a:lnRef>
+          <a:fillRef idx="0">
+            <a:schemeClr val="accent1"/>
+          </a:fillRef>
+          <a:effectRef idx="1">
+            <a:schemeClr val="accent1"/>
+          </a:effectRef>
+          <a:fontRef idx="minor">
+            <a:schemeClr val="tx1"/>
+          </a:fontRef>
+        </p:style>
+      </p:cxnSp>
+      <p:cxnSp>
+        <p:nvCxnSpPr>
+          <p:cNvPr id="57" name="Straight Arrow Connector 56">
+            <a:extLst>
+              <a:ext uri="{FF2B5EF4-FFF2-40B4-BE49-F238E27FC236}">
+                <a16:creationId xmlns:a16="http://schemas.microsoft.com/office/drawing/2014/main" id="{2FECFEA0-4A9E-D2E4-9B1B-6219A9824E13}"/>
+              </a:ext>
+            </a:extLst>
+          </p:cNvPr>
+          <p:cNvCxnSpPr>
+            <a:cxnSpLocks/>
+            <a:stCxn id="53" idx="2"/>
+          </p:cNvCxnSpPr>
+          <p:nvPr/>
+        </p:nvCxnSpPr>
+        <p:spPr>
+          <a:xfrm>
+            <a:off x="7001398" y="1692895"/>
+            <a:ext cx="25496" cy="1618848"/>
+          </a:xfrm>
+          <a:prstGeom prst="straightConnector1">
+            <a:avLst/>
+          </a:prstGeom>
+          <a:ln>
+            <a:solidFill>
+              <a:schemeClr val="tx1">
+                <a:lumMod val="95000"/>
+                <a:lumOff val="5000"/>
+              </a:schemeClr>
+            </a:solidFill>
+            <a:tailEnd type="triangle"/>
+          </a:ln>
+        </p:spPr>
+        <p:style>
+          <a:lnRef idx="2">
+            <a:schemeClr val="accent1"/>
+          </a:lnRef>
+          <a:fillRef idx="0">
+            <a:schemeClr val="accent1"/>
+          </a:fillRef>
+          <a:effectRef idx="1">
+            <a:schemeClr val="accent1"/>
+          </a:effectRef>
+          <a:fontRef idx="minor">
+            <a:schemeClr val="tx1"/>
+          </a:fontRef>
+        </p:style>
+      </p:cxnSp>
+      <p:sp>
+        <p:nvSpPr>
+          <p:cNvPr id="70" name="TextBox 69">
+            <a:extLst>
+              <a:ext uri="{FF2B5EF4-FFF2-40B4-BE49-F238E27FC236}">
+                <a16:creationId xmlns:a16="http://schemas.microsoft.com/office/drawing/2014/main" id="{47858F73-FA08-FD99-1282-F82D0B9B1B3E}"/>
+              </a:ext>
+            </a:extLst>
+          </p:cNvPr>
+          <p:cNvSpPr txBox="1"/>
+          <p:nvPr/>
+        </p:nvSpPr>
+        <p:spPr>
+          <a:xfrm>
+            <a:off x="-138575" y="2972698"/>
+            <a:ext cx="3116677" cy="1569660"/>
+          </a:xfrm>
+          <a:prstGeom prst="rect">
+            <a:avLst/>
+          </a:prstGeom>
+          <a:noFill/>
+        </p:spPr>
+        <p:txBody>
+          <a:bodyPr wrap="square" rtlCol="0">
+            <a:spAutoFit/>
+          </a:bodyPr>
+          <a:lstStyle/>
+          <a:p>
+            <a:pPr marL="285750" indent="-285750">
+              <a:buFont typeface="Arial" panose="020B0604020202020204" pitchFamily="34" charset="0"/>
+              <a:buChar char="•"/>
+            </a:pPr>
+            <a:r>
+              <a:rPr lang="sv-SE" sz="1600" dirty="0"/>
+              <a:t>MEW:  </a:t>
+            </a:r>
+            <a:r>
+              <a:rPr lang="sv-SE" sz="1600" dirty="0" err="1"/>
+              <a:t>confirmed</a:t>
+            </a:r>
+            <a:endParaRPr lang="sv-SE" sz="1600" dirty="0"/>
+          </a:p>
+          <a:p>
+            <a:endParaRPr lang="sv-SE" sz="1600" dirty="0"/>
+          </a:p>
+          <a:p>
+            <a:pPr marL="285750" indent="-285750">
+              <a:buFont typeface="Arial" panose="020B0604020202020204" pitchFamily="34" charset="0"/>
+              <a:buChar char="•"/>
+            </a:pPr>
+            <a:r>
+              <a:rPr lang="sv-SE" sz="1600" dirty="0" err="1"/>
+              <a:t>Operational</a:t>
+            </a:r>
+            <a:r>
+              <a:rPr lang="sv-SE" sz="1600" dirty="0"/>
+              <a:t>: </a:t>
+            </a:r>
+            <a:r>
+              <a:rPr lang="sv-SE" sz="1600" dirty="0" err="1"/>
+              <a:t>simplified</a:t>
+            </a:r>
+            <a:r>
+              <a:rPr lang="sv-SE" sz="1600" dirty="0"/>
+              <a:t> to 6</a:t>
+            </a:r>
+          </a:p>
+          <a:p>
+            <a:endParaRPr lang="sv-SE" sz="1600" dirty="0"/>
+          </a:p>
+          <a:p>
+            <a:pPr marL="285750" indent="-285750">
+              <a:buFont typeface="Arial" panose="020B0604020202020204" pitchFamily="34" charset="0"/>
+              <a:buChar char="•"/>
+            </a:pPr>
+            <a:r>
+              <a:rPr lang="sv-SE" sz="1600" dirty="0"/>
+              <a:t>Socio </a:t>
+            </a:r>
+            <a:r>
+              <a:rPr lang="sv-SE" sz="1600" dirty="0" err="1"/>
+              <a:t>economic</a:t>
+            </a:r>
+            <a:r>
+              <a:rPr lang="sv-SE" sz="1600" dirty="0"/>
+              <a:t>: </a:t>
+            </a:r>
+            <a:r>
+              <a:rPr lang="sv-SE" sz="1600" dirty="0" err="1"/>
+              <a:t>expanded</a:t>
+            </a:r>
+            <a:r>
+              <a:rPr lang="sv-SE" sz="1600" dirty="0"/>
+              <a:t> to 12</a:t>
+            </a:r>
+          </a:p>
+        </p:txBody>
+      </p:sp>
+      <p:sp>
+        <p:nvSpPr>
+          <p:cNvPr id="73" name="TextBox 72">
+            <a:extLst>
+              <a:ext uri="{FF2B5EF4-FFF2-40B4-BE49-F238E27FC236}">
+                <a16:creationId xmlns:a16="http://schemas.microsoft.com/office/drawing/2014/main" id="{F2565C75-A53D-ECBC-CDBF-71B8CABE7BDA}"/>
+              </a:ext>
+            </a:extLst>
+          </p:cNvPr>
+          <p:cNvSpPr txBox="1"/>
+          <p:nvPr/>
+        </p:nvSpPr>
+        <p:spPr>
+          <a:xfrm>
+            <a:off x="-350520" y="5322720"/>
+            <a:ext cx="3116677" cy="2308324"/>
+          </a:xfrm>
+          <a:prstGeom prst="rect">
+            <a:avLst/>
+          </a:prstGeom>
+          <a:noFill/>
+        </p:spPr>
+        <p:txBody>
+          <a:bodyPr wrap="square" rtlCol="0">
+            <a:spAutoFit/>
+          </a:bodyPr>
+          <a:lstStyle/>
+          <a:p>
+            <a:pPr marL="285750" indent="-285750">
+              <a:buFont typeface="Arial" panose="020B0604020202020204" pitchFamily="34" charset="0"/>
+              <a:buChar char="•"/>
+            </a:pPr>
+            <a:r>
+              <a:rPr lang="sv-SE" sz="1600" dirty="0"/>
+              <a:t>MEW:  </a:t>
+            </a:r>
+            <a:r>
+              <a:rPr lang="sv-SE" sz="1600" dirty="0" err="1"/>
+              <a:t>confirmed</a:t>
+            </a:r>
+            <a:r>
+              <a:rPr lang="sv-SE" sz="1600" dirty="0"/>
+              <a:t> and </a:t>
+            </a:r>
+            <a:r>
+              <a:rPr lang="sv-SE" sz="1600" dirty="0" err="1"/>
+              <a:t>validated</a:t>
+            </a:r>
+            <a:r>
+              <a:rPr lang="sv-SE" sz="1600" dirty="0"/>
+              <a:t> as </a:t>
+            </a:r>
+            <a:r>
+              <a:rPr lang="sv-SE" sz="1600" dirty="0" err="1"/>
+              <a:t>mutually</a:t>
+            </a:r>
+            <a:r>
+              <a:rPr lang="sv-SE" sz="1600" dirty="0"/>
+              <a:t> </a:t>
+            </a:r>
+            <a:r>
+              <a:rPr lang="sv-SE" sz="1600" dirty="0" err="1"/>
+              <a:t>exclusive</a:t>
+            </a:r>
+            <a:endParaRPr lang="sv-SE" sz="1600" dirty="0"/>
+          </a:p>
+          <a:p>
+            <a:endParaRPr lang="sv-SE" sz="1600" dirty="0"/>
+          </a:p>
+          <a:p>
+            <a:pPr marL="285750" indent="-285750">
+              <a:buFont typeface="Arial" panose="020B0604020202020204" pitchFamily="34" charset="0"/>
+              <a:buChar char="•"/>
+            </a:pPr>
+            <a:r>
+              <a:rPr lang="sv-SE" sz="1600" dirty="0" err="1"/>
+              <a:t>Operational</a:t>
+            </a:r>
+            <a:r>
+              <a:rPr lang="sv-SE" sz="1600" dirty="0"/>
+              <a:t>: </a:t>
+            </a:r>
+            <a:r>
+              <a:rPr lang="sv-SE" sz="1600" dirty="0" err="1"/>
+              <a:t>revised</a:t>
+            </a:r>
+            <a:r>
+              <a:rPr lang="sv-SE" sz="1600" dirty="0"/>
+              <a:t> to </a:t>
+            </a:r>
+            <a:r>
+              <a:rPr lang="sv-SE" sz="1600" dirty="0" err="1"/>
+              <a:t>accommodate</a:t>
+            </a:r>
+            <a:r>
+              <a:rPr lang="sv-SE" sz="1600" dirty="0"/>
+              <a:t> </a:t>
+            </a:r>
+            <a:r>
+              <a:rPr lang="sv-SE" sz="1600" dirty="0" err="1"/>
+              <a:t>gear</a:t>
+            </a:r>
+            <a:r>
+              <a:rPr lang="sv-SE" sz="1600" dirty="0"/>
+              <a:t>, </a:t>
+            </a:r>
+            <a:r>
+              <a:rPr lang="sv-SE" sz="1600" dirty="0" err="1"/>
+              <a:t>target</a:t>
+            </a:r>
+            <a:r>
+              <a:rPr lang="sv-SE" sz="1600" dirty="0"/>
+              <a:t> species and </a:t>
+            </a:r>
+            <a:r>
+              <a:rPr lang="sv-SE" sz="1600" dirty="0" err="1"/>
+              <a:t>strategies</a:t>
+            </a:r>
+            <a:endParaRPr lang="sv-SE" sz="1600" dirty="0"/>
+          </a:p>
+          <a:p>
+            <a:endParaRPr lang="sv-SE" sz="1600" dirty="0"/>
+          </a:p>
+          <a:p>
+            <a:pPr marL="285750" indent="-285750">
+              <a:buFont typeface="Arial" panose="020B0604020202020204" pitchFamily="34" charset="0"/>
+              <a:buChar char="•"/>
+            </a:pPr>
+            <a:r>
+              <a:rPr lang="sv-SE" sz="1600" dirty="0"/>
+              <a:t>Socio </a:t>
+            </a:r>
+            <a:r>
+              <a:rPr lang="sv-SE" sz="1600" dirty="0" err="1"/>
+              <a:t>economic</a:t>
+            </a:r>
+            <a:r>
+              <a:rPr lang="sv-SE" sz="1600" dirty="0"/>
+              <a:t>: </a:t>
+            </a:r>
+            <a:r>
+              <a:rPr lang="sv-SE" sz="1600" dirty="0" err="1"/>
+              <a:t>confirmed</a:t>
+            </a:r>
+            <a:endParaRPr lang="sv-SE" sz="1600" dirty="0"/>
+          </a:p>
+        </p:txBody>
+      </p:sp>
+      <p:sp>
+        <p:nvSpPr>
+          <p:cNvPr id="101" name="Rectangle 100">
+            <a:extLst>
+              <a:ext uri="{FF2B5EF4-FFF2-40B4-BE49-F238E27FC236}">
+                <a16:creationId xmlns:a16="http://schemas.microsoft.com/office/drawing/2014/main" id="{541A6DB1-0D7C-41E8-C50D-2601BCC6C323}"/>
+              </a:ext>
+            </a:extLst>
+          </p:cNvPr>
+          <p:cNvSpPr/>
+          <p:nvPr/>
+        </p:nvSpPr>
+        <p:spPr>
+          <a:xfrm>
+            <a:off x="7378348" y="5771617"/>
+            <a:ext cx="495302" cy="398971"/>
+          </a:xfrm>
+          <a:prstGeom prst="rect">
+            <a:avLst/>
+          </a:prstGeom>
+          <a:noFill/>
+        </p:spPr>
+        <p:style>
+          <a:lnRef idx="2">
+            <a:schemeClr val="accent1">
+              <a:shade val="15000"/>
+            </a:schemeClr>
+          </a:lnRef>
+          <a:fillRef idx="1">
+            <a:schemeClr val="accent1"/>
+          </a:fillRef>
+          <a:effectRef idx="0">
+            <a:schemeClr val="accent1"/>
+          </a:effectRef>
+          <a:fontRef idx="minor">
+            <a:schemeClr val="lt1"/>
+          </a:fontRef>
+        </p:style>
+        <p:txBody>
+          <a:bodyPr rtlCol="0" anchor="ctr"/>
+          <a:lstStyle/>
+          <a:p>
+            <a:pPr algn="ctr"/>
+            <a:endParaRPr lang="sv-SE"/>
+          </a:p>
+        </p:txBody>
+      </p:sp>
+      <p:sp>
+        <p:nvSpPr>
+          <p:cNvPr id="102" name="Rectangle 101">
+            <a:extLst>
+              <a:ext uri="{FF2B5EF4-FFF2-40B4-BE49-F238E27FC236}">
+                <a16:creationId xmlns:a16="http://schemas.microsoft.com/office/drawing/2014/main" id="{7A0167F1-59ED-71AB-0DD2-D9857B8EC868}"/>
+              </a:ext>
+            </a:extLst>
+          </p:cNvPr>
+          <p:cNvSpPr/>
+          <p:nvPr/>
+        </p:nvSpPr>
+        <p:spPr>
+          <a:xfrm>
+            <a:off x="7026894" y="5065615"/>
+            <a:ext cx="2861227" cy="3138507"/>
+          </a:xfrm>
+          <a:prstGeom prst="rect">
+            <a:avLst/>
+          </a:prstGeom>
+          <a:noFill/>
+          <a:ln>
+            <a:solidFill>
+              <a:schemeClr val="tx1">
+                <a:lumMod val="95000"/>
+                <a:lumOff val="5000"/>
+              </a:schemeClr>
+            </a:solidFill>
+          </a:ln>
+        </p:spPr>
+        <p:style>
+          <a:lnRef idx="2">
+            <a:schemeClr val="accent1">
+              <a:shade val="15000"/>
+            </a:schemeClr>
+          </a:lnRef>
+          <a:fillRef idx="1">
+            <a:schemeClr val="accent1"/>
+          </a:fillRef>
+          <a:effectRef idx="0">
+            <a:schemeClr val="accent1"/>
+          </a:effectRef>
+          <a:fontRef idx="minor">
+            <a:schemeClr val="lt1"/>
+          </a:fontRef>
+        </p:style>
+        <p:txBody>
+          <a:bodyPr rtlCol="0" anchor="ctr"/>
+          <a:lstStyle/>
+          <a:p>
+            <a:pPr algn="ctr"/>
+            <a:endParaRPr lang="sv-SE"/>
+          </a:p>
+        </p:txBody>
+      </p:sp>
+      <p:sp>
+        <p:nvSpPr>
+          <p:cNvPr id="103" name="TextBox 102">
+            <a:extLst>
+              <a:ext uri="{FF2B5EF4-FFF2-40B4-BE49-F238E27FC236}">
+                <a16:creationId xmlns:a16="http://schemas.microsoft.com/office/drawing/2014/main" id="{AEA61BAC-124F-F8C2-BF4C-891DD50FF2D2}"/>
+              </a:ext>
+            </a:extLst>
+          </p:cNvPr>
+          <p:cNvSpPr txBox="1"/>
+          <p:nvPr/>
+        </p:nvSpPr>
+        <p:spPr>
+          <a:xfrm>
+            <a:off x="8001837" y="5167308"/>
+            <a:ext cx="911340" cy="369332"/>
+          </a:xfrm>
+          <a:prstGeom prst="rect">
+            <a:avLst/>
+          </a:prstGeom>
+          <a:noFill/>
+        </p:spPr>
+        <p:txBody>
+          <a:bodyPr wrap="none" rtlCol="0">
+            <a:spAutoFit/>
+          </a:bodyPr>
+          <a:lstStyle/>
+          <a:p>
+            <a:r>
+              <a:rPr lang="sv-SE" dirty="0"/>
+              <a:t>Legend</a:t>
+            </a:r>
+          </a:p>
+        </p:txBody>
+      </p:sp>
+      <p:sp>
+        <p:nvSpPr>
+          <p:cNvPr id="104" name="TextBox 103">
+            <a:extLst>
+              <a:ext uri="{FF2B5EF4-FFF2-40B4-BE49-F238E27FC236}">
+                <a16:creationId xmlns:a16="http://schemas.microsoft.com/office/drawing/2014/main" id="{A6B9D231-52D0-F24B-C3CC-D7F6235AB7CE}"/>
+              </a:ext>
+            </a:extLst>
+          </p:cNvPr>
+          <p:cNvSpPr txBox="1"/>
+          <p:nvPr/>
+        </p:nvSpPr>
+        <p:spPr>
+          <a:xfrm>
+            <a:off x="7890398" y="5768696"/>
+            <a:ext cx="1734257" cy="369332"/>
+          </a:xfrm>
+          <a:prstGeom prst="rect">
+            <a:avLst/>
+          </a:prstGeom>
+          <a:noFill/>
+        </p:spPr>
+        <p:txBody>
+          <a:bodyPr wrap="none" rtlCol="0">
+            <a:spAutoFit/>
+          </a:bodyPr>
+          <a:lstStyle/>
+          <a:p>
+            <a:r>
+              <a:rPr lang="sv-SE" dirty="0"/>
+              <a:t>List </a:t>
+            </a:r>
+            <a:r>
+              <a:rPr lang="sv-SE" dirty="0" err="1"/>
+              <a:t>of</a:t>
+            </a:r>
+            <a:r>
+              <a:rPr lang="sv-SE" dirty="0"/>
+              <a:t> </a:t>
+            </a:r>
+            <a:r>
+              <a:rPr lang="sv-SE" dirty="0" err="1"/>
+              <a:t>variables</a:t>
+            </a:r>
+            <a:endParaRPr lang="sv-SE" dirty="0"/>
+          </a:p>
+        </p:txBody>
+      </p:sp>
+      <p:sp>
+        <p:nvSpPr>
+          <p:cNvPr id="105" name="TextBox 104">
+            <a:extLst>
+              <a:ext uri="{FF2B5EF4-FFF2-40B4-BE49-F238E27FC236}">
+                <a16:creationId xmlns:a16="http://schemas.microsoft.com/office/drawing/2014/main" id="{D9828890-BBAF-3897-5B93-D982D786F0E5}"/>
+              </a:ext>
+            </a:extLst>
+          </p:cNvPr>
+          <p:cNvSpPr txBox="1"/>
+          <p:nvPr/>
+        </p:nvSpPr>
+        <p:spPr>
+          <a:xfrm>
+            <a:off x="8007518" y="6420641"/>
+            <a:ext cx="1617137" cy="646331"/>
+          </a:xfrm>
+          <a:prstGeom prst="rect">
+            <a:avLst/>
+          </a:prstGeom>
+          <a:noFill/>
+        </p:spPr>
+        <p:txBody>
+          <a:bodyPr wrap="square" rtlCol="0">
+            <a:spAutoFit/>
+          </a:bodyPr>
+          <a:lstStyle/>
+          <a:p>
+            <a:r>
+              <a:rPr lang="sv-SE" dirty="0"/>
+              <a:t>Revision from scientist team</a:t>
+            </a:r>
+          </a:p>
+        </p:txBody>
+      </p:sp>
+      <p:sp>
+        <p:nvSpPr>
+          <p:cNvPr id="106" name="TextBox 105">
+            <a:extLst>
+              <a:ext uri="{FF2B5EF4-FFF2-40B4-BE49-F238E27FC236}">
+                <a16:creationId xmlns:a16="http://schemas.microsoft.com/office/drawing/2014/main" id="{39ED20C9-62B9-76CA-4BB9-221689094127}"/>
+              </a:ext>
+            </a:extLst>
+          </p:cNvPr>
+          <p:cNvSpPr txBox="1"/>
+          <p:nvPr/>
+        </p:nvSpPr>
+        <p:spPr>
+          <a:xfrm>
+            <a:off x="8007518" y="7259537"/>
+            <a:ext cx="1617137" cy="646331"/>
+          </a:xfrm>
+          <a:prstGeom prst="rect">
+            <a:avLst/>
+          </a:prstGeom>
+          <a:noFill/>
+        </p:spPr>
+        <p:txBody>
+          <a:bodyPr wrap="square" rtlCol="0">
+            <a:spAutoFit/>
+          </a:bodyPr>
+          <a:lstStyle/>
+          <a:p>
+            <a:r>
+              <a:rPr lang="sv-SE" dirty="0" err="1"/>
+              <a:t>Interview</a:t>
+            </a:r>
+            <a:r>
+              <a:rPr lang="sv-SE" dirty="0"/>
+              <a:t> </a:t>
+            </a:r>
+            <a:r>
+              <a:rPr lang="sv-SE" dirty="0" err="1"/>
+              <a:t>with</a:t>
+            </a:r>
+            <a:r>
+              <a:rPr lang="sv-SE" dirty="0"/>
+              <a:t> </a:t>
+            </a:r>
+            <a:r>
+              <a:rPr lang="sv-SE" dirty="0" err="1"/>
+              <a:t>fishers</a:t>
+            </a:r>
+            <a:endParaRPr lang="sv-SE" dirty="0"/>
+          </a:p>
+        </p:txBody>
+      </p:sp>
+      <p:sp>
+        <p:nvSpPr>
+          <p:cNvPr id="2" name="TextBox 1">
+            <a:extLst>
+              <a:ext uri="{FF2B5EF4-FFF2-40B4-BE49-F238E27FC236}">
+                <a16:creationId xmlns:a16="http://schemas.microsoft.com/office/drawing/2014/main" id="{8B37FBD6-5AE3-4C0E-2AF2-237C2CDB5F99}"/>
+              </a:ext>
+            </a:extLst>
+          </p:cNvPr>
+          <p:cNvSpPr txBox="1"/>
+          <p:nvPr/>
+        </p:nvSpPr>
+        <p:spPr>
+          <a:xfrm>
+            <a:off x="2766157" y="-1372477"/>
+            <a:ext cx="2124911" cy="369332"/>
+          </a:xfrm>
+          <a:prstGeom prst="rect">
+            <a:avLst/>
+          </a:prstGeom>
+          <a:noFill/>
+        </p:spPr>
+        <p:txBody>
+          <a:bodyPr wrap="square" rtlCol="0">
+            <a:spAutoFit/>
+          </a:bodyPr>
+          <a:lstStyle/>
+          <a:p>
+            <a:r>
+              <a:rPr lang="sv-SE" dirty="0" err="1"/>
+              <a:t>Preparatory</a:t>
+            </a:r>
+            <a:r>
+              <a:rPr lang="sv-SE" dirty="0"/>
+              <a:t> </a:t>
+            </a:r>
+            <a:r>
+              <a:rPr lang="sv-SE" dirty="0" err="1"/>
+              <a:t>work</a:t>
+            </a:r>
+            <a:endParaRPr lang="sv-SE" dirty="0"/>
+          </a:p>
+        </p:txBody>
+      </p:sp>
+    </p:spTree>
+    <p:extLst>
+      <p:ext uri="{BB962C8B-B14F-4D97-AF65-F5344CB8AC3E}">
+        <p14:creationId xmlns:p14="http://schemas.microsoft.com/office/powerpoint/2010/main" val="2235467564"/>
+      </p:ext>
+    </p:extLst>
+  </p:cSld>
+  <p:clrMapOvr>
+    <a:masterClrMapping/>
+  </p:clrMapOvr>
+</p:sld>
+</file>
+
+<file path=ppt/slides/slide8.xml><?xml version="1.0" encoding="utf-8"?>
+<p:sld xmlns:a="http://schemas.openxmlformats.org/drawingml/2006/main" xmlns:r="http://schemas.openxmlformats.org/officeDocument/2006/relationships" xmlns:p="http://schemas.openxmlformats.org/presentationml/2006/main">
+  <p:cSld>
+    <p:spTree>
+      <p:nvGrpSpPr>
+        <p:cNvPr id="1" name=""/>
+        <p:cNvGrpSpPr/>
+        <p:nvPr/>
+      </p:nvGrpSpPr>
+      <p:grpSpPr>
+        <a:xfrm>
+          <a:off x="0" y="0"/>
+          <a:ext cx="0" cy="0"/>
+          <a:chOff x="0" y="0"/>
+          <a:chExt cx="0" cy="0"/>
+        </a:xfrm>
+      </p:grpSpPr>
+      <p:pic>
+        <p:nvPicPr>
+          <p:cNvPr id="2" name="Picture 1">
+            <a:extLst>
+              <a:ext uri="{FF2B5EF4-FFF2-40B4-BE49-F238E27FC236}">
+                <a16:creationId xmlns:a16="http://schemas.microsoft.com/office/drawing/2014/main" id="{3912A6E5-3E6C-43A9-1145-4C4D92F9FE40}"/>
+              </a:ext>
+            </a:extLst>
+          </p:cNvPr>
+          <p:cNvPicPr>
+            <a:picLocks noChangeAspect="1"/>
+          </p:cNvPicPr>
+          <p:nvPr/>
+        </p:nvPicPr>
+        <p:blipFill>
+          <a:blip r:embed="rId2"/>
+          <a:stretch>
+            <a:fillRect/>
+          </a:stretch>
+        </p:blipFill>
+        <p:spPr>
+          <a:xfrm>
+            <a:off x="2098741" y="0"/>
+            <a:ext cx="7994518" cy="6858000"/>
+          </a:xfrm>
+          <a:prstGeom prst="rect">
+            <a:avLst/>
+          </a:prstGeom>
+        </p:spPr>
+      </p:pic>
+    </p:spTree>
+    <p:extLst>
+      <p:ext uri="{BB962C8B-B14F-4D97-AF65-F5344CB8AC3E}">
+        <p14:creationId xmlns:p14="http://schemas.microsoft.com/office/powerpoint/2010/main" val="580958101"/>
       </p:ext>
     </p:extLst>
   </p:cSld>
